--- a/deliverables/泰隆银行上海分行与腾讯WorkBuddy合作推进情况汇报_20260803.pptx
+++ b/deliverables/泰隆银行上海分行与腾讯WorkBuddy合作推进情况汇报_20260803.pptx
@@ -3315,7 +3315,7 @@
         <p:spPr>
           <a:xfrm>
             <a:off x="731520" y="3429000"/>
-            <a:ext cx="10515600" cy="1005840"/>
+            <a:ext cx="10515600" cy="1188720"/>
           </a:xfrm>
           <a:prstGeom prst="rect">
             <a:avLst/>
@@ -3330,25 +3330,25 @@
           <a:p>
             <a:pPr algn="l"/>
             <a:r>
-              <a:rPr sz="1600" b="0">
+              <a:rPr sz="1500" b="0">
                 <a:solidFill>
                   <a:srgbClr val="F3F6FA"/>
                 </a:solidFill>
                 <a:latin typeface="Microsoft YaHei"/>
               </a:rPr>
-              <a:t>两轮洽谈后，双方已明确以「积分商城兑换 + 开户赠送AI权益」为主要合作方向；</a:t>
+              <a:t>主方向：积分商城兑换 + 开户赠送AI权益；同步补充「行员采购 + 行外采购」双轨份额，</a:t>
             </a:r>
           </a:p>
           <a:p>
             <a:pPr algn="l"/>
             <a:r>
-              <a:rPr sz="1600" b="0">
+              <a:rPr sz="1500" b="0">
                 <a:solidFill>
                   <a:srgbClr val="F3F6FA"/>
                 </a:solidFill>
                 <a:latin typeface="Microsoft YaHei"/>
               </a:rPr>
-              <a:t>建议原则同意推进，1,500万元仅为方案框架，先合规审查与小范围试点，再分阶段采购。</a:t>
+              <a:t>并研究联名信用卡。建议原则同意推进，1,500万元仅为方案框架，先合规审查与小范围试点。</a:t>
             </a:r>
           </a:p>
         </p:txBody>
@@ -3418,7 +3418,7 @@
                 </a:solidFill>
                 <a:latin typeface="Microsoft YaHei"/>
               </a:rPr>
-              <a:t>状态分层：已达成共识｜初步方案｜尚待确认</a:t>
+              <a:t>三条主线：行外客户｜行内员工｜联名信用卡　　状态：已达成共识｜初步方案｜尚待确认</a:t>
             </a:r>
           </a:p>
         </p:txBody>
@@ -3638,7 +3638,7 @@
                 </a:solidFill>
                 <a:latin typeface="Microsoft YaHei"/>
               </a:rPr>
-              <a:t>服务中小微企业 · 纳入客户权益体系 · 助力新增对公客户</a:t>
+              <a:t>行外客户权益 + 行内员工份额 + 联名信用卡</a:t>
             </a:r>
           </a:p>
         </p:txBody>
@@ -3651,8 +3651,124 @@
         </p:nvSpPr>
         <p:spPr>
           <a:xfrm>
-            <a:off x="411480" y="1097280"/>
-            <a:ext cx="11338560" cy="777240"/>
+            <a:off x="365760" y="1097280"/>
+            <a:ext cx="3703320" cy="1051560"/>
+          </a:xfrm>
+          <a:prstGeom prst="roundRect">
+            <a:avLst>
+              <a:gd name="adj" fmla="val 8000"/>
+            </a:avLst>
+          </a:prstGeom>
+          <a:solidFill>
+            <a:srgbClr val="0B2F5B"/>
+          </a:solidFill>
+          <a:ln>
+            <a:noFill/>
+          </a:ln>
+          <a:effectLst/>
+        </p:spPr>
+        <p:style>
+          <a:lnRef idx="1">
+            <a:schemeClr val="accent1"/>
+          </a:lnRef>
+          <a:fillRef idx="3">
+            <a:schemeClr val="accent1"/>
+          </a:fillRef>
+          <a:effectRef idx="2">
+            <a:schemeClr val="accent1"/>
+          </a:effectRef>
+          <a:fontRef idx="minor">
+            <a:schemeClr val="lt1"/>
+          </a:fontRef>
+        </p:style>
+        <p:txBody>
+          <a:bodyPr rtlCol="0" anchor="ctr"/>
+          <a:lstStyle/>
+          <a:p>
+            <a:pPr algn="ctr"/>
+          </a:p>
+        </p:txBody>
+      </p:sp>
+      <p:sp>
+        <p:nvSpPr>
+          <p:cNvPr id="8" name="TextBox 7"/>
+          <p:cNvSpPr txBox="1"/>
+          <p:nvPr/>
+        </p:nvSpPr>
+        <p:spPr>
+          <a:xfrm>
+            <a:off x="548640" y="1234440"/>
+            <a:ext cx="3337560" cy="365760"/>
+          </a:xfrm>
+          <a:prstGeom prst="rect">
+            <a:avLst/>
+          </a:prstGeom>
+          <a:noFill/>
+        </p:spPr>
+        <p:txBody>
+          <a:bodyPr wrap="square" lIns="0" rIns="0" tIns="0" bIns="0" anchor="t">
+            <a:spAutoFit/>
+          </a:bodyPr>
+          <a:lstStyle/>
+          <a:p>
+            <a:pPr algn="l"/>
+            <a:r>
+              <a:rPr sz="1400" b="1">
+                <a:solidFill>
+                  <a:srgbClr val="C4A35A"/>
+                </a:solidFill>
+                <a:latin typeface="Microsoft YaHei"/>
+              </a:rPr>
+              <a:t>行外客户（已达成共识）</a:t>
+            </a:r>
+          </a:p>
+        </p:txBody>
+      </p:sp>
+      <p:sp>
+        <p:nvSpPr>
+          <p:cNvPr id="9" name="TextBox 8"/>
+          <p:cNvSpPr txBox="1"/>
+          <p:nvPr/>
+        </p:nvSpPr>
+        <p:spPr>
+          <a:xfrm>
+            <a:off x="548640" y="1645920"/>
+            <a:ext cx="3337560" cy="365760"/>
+          </a:xfrm>
+          <a:prstGeom prst="rect">
+            <a:avLst/>
+          </a:prstGeom>
+          <a:noFill/>
+        </p:spPr>
+        <p:txBody>
+          <a:bodyPr wrap="square" lIns="0" rIns="0" tIns="0" bIns="0" anchor="t">
+            <a:spAutoFit/>
+          </a:bodyPr>
+          <a:lstStyle/>
+          <a:p>
+            <a:pPr algn="l"/>
+            <a:r>
+              <a:rPr sz="1100" b="0">
+                <a:solidFill>
+                  <a:srgbClr val="FFFFFF"/>
+                </a:solidFill>
+                <a:latin typeface="Microsoft YaHei"/>
+              </a:rPr>
+              <a:t>积分商城兑换 · 开户/拜访赠礼 · 联合推广</a:t>
+            </a:r>
+          </a:p>
+        </p:txBody>
+      </p:sp>
+      <p:sp>
+        <p:nvSpPr>
+          <p:cNvPr id="10" name="Rounded Rectangle 9"/>
+          <p:cNvSpPr/>
+          <p:nvPr/>
+        </p:nvSpPr>
+        <p:spPr>
+          <a:xfrm>
+            <a:off x="4251960" y="1097280"/>
+            <a:ext cx="3703320" cy="1051560"/>
           </a:xfrm>
           <a:prstGeom prst="roundRect">
             <a:avLst>
@@ -3691,14 +3807,14 @@
       </p:sp>
       <p:sp>
         <p:nvSpPr>
-          <p:cNvPr id="8" name="TextBox 7"/>
+          <p:cNvPr id="11" name="TextBox 10"/>
           <p:cNvSpPr txBox="1"/>
           <p:nvPr/>
         </p:nvSpPr>
         <p:spPr>
           <a:xfrm>
-            <a:off x="640080" y="1234440"/>
-            <a:ext cx="10972800" cy="502920"/>
+            <a:off x="4434840" y="1234440"/>
+            <a:ext cx="3337560" cy="365760"/>
           </a:xfrm>
           <a:prstGeom prst="rect">
             <a:avLst/>
@@ -3713,39 +3829,178 @@
           <a:p>
             <a:pPr algn="l"/>
             <a:r>
-              <a:rPr sz="1200" b="0">
+              <a:rPr sz="1400" b="1">
+                <a:solidFill>
+                  <a:srgbClr val="0B2F5B"/>
+                </a:solidFill>
+                <a:latin typeface="Microsoft YaHei"/>
+              </a:rPr>
+              <a:t>行内员工（初步方案）</a:t>
+            </a:r>
+          </a:p>
+        </p:txBody>
+      </p:sp>
+      <p:sp>
+        <p:nvSpPr>
+          <p:cNvPr id="12" name="TextBox 11"/>
+          <p:cNvSpPr txBox="1"/>
+          <p:nvPr/>
+        </p:nvSpPr>
+        <p:spPr>
+          <a:xfrm>
+            <a:off x="4434840" y="1645920"/>
+            <a:ext cx="3337560" cy="365760"/>
+          </a:xfrm>
+          <a:prstGeom prst="rect">
+            <a:avLst/>
+          </a:prstGeom>
+          <a:noFill/>
+        </p:spPr>
+        <p:txBody>
+          <a:bodyPr wrap="square" lIns="0" rIns="0" tIns="0" bIns="0" anchor="t">
+            <a:spAutoFit/>
+          </a:bodyPr>
+          <a:lstStyle/>
+          <a:p>
+            <a:pPr algn="l"/>
+            <a:r>
+              <a:rPr sz="1100" b="0">
                 <a:solidFill>
                   <a:srgbClr val="1F2A37"/>
                 </a:solidFill>
                 <a:latin typeface="Microsoft YaHei"/>
               </a:rPr>
-              <a:t>背景：上海经营约16年、近100万客户，传统产品同质化明显；需引入贴近企业经营的非金融增值服务，提高开户吸引力与存量黏性。</a:t>
-            </a:r>
-          </a:p>
+              <a:t>办公提效系统/小程序 · 员工AI福利发放</a:t>
+            </a:r>
+          </a:p>
+        </p:txBody>
+      </p:sp>
+      <p:sp>
+        <p:nvSpPr>
+          <p:cNvPr id="13" name="Rounded Rectangle 12"/>
+          <p:cNvSpPr/>
+          <p:nvPr/>
+        </p:nvSpPr>
+        <p:spPr>
+          <a:xfrm>
+            <a:off x="8138160" y="1097280"/>
+            <a:ext cx="3703320" cy="1051560"/>
+          </a:xfrm>
+          <a:prstGeom prst="roundRect">
+            <a:avLst>
+              <a:gd name="adj" fmla="val 8000"/>
+            </a:avLst>
+          </a:prstGeom>
+          <a:solidFill>
+            <a:srgbClr val="E8EEF5"/>
+          </a:solidFill>
+          <a:ln>
+            <a:noFill/>
+          </a:ln>
+          <a:effectLst/>
+        </p:spPr>
+        <p:style>
+          <a:lnRef idx="1">
+            <a:schemeClr val="accent1"/>
+          </a:lnRef>
+          <a:fillRef idx="3">
+            <a:schemeClr val="accent1"/>
+          </a:fillRef>
+          <a:effectRef idx="2">
+            <a:schemeClr val="accent1"/>
+          </a:effectRef>
+          <a:fontRef idx="minor">
+            <a:schemeClr val="lt1"/>
+          </a:fontRef>
+        </p:style>
+        <p:txBody>
+          <a:bodyPr rtlCol="0" anchor="ctr"/>
+          <a:lstStyle/>
+          <a:p>
+            <a:pPr algn="ctr"/>
+          </a:p>
+        </p:txBody>
+      </p:sp>
+      <p:sp>
+        <p:nvSpPr>
+          <p:cNvPr id="14" name="TextBox 13"/>
+          <p:cNvSpPr txBox="1"/>
+          <p:nvPr/>
+        </p:nvSpPr>
+        <p:spPr>
+          <a:xfrm>
+            <a:off x="8321040" y="1234440"/>
+            <a:ext cx="3337560" cy="365760"/>
+          </a:xfrm>
+          <a:prstGeom prst="rect">
+            <a:avLst/>
+          </a:prstGeom>
+          <a:noFill/>
+        </p:spPr>
+        <p:txBody>
+          <a:bodyPr wrap="square" lIns="0" rIns="0" tIns="0" bIns="0" anchor="t">
+            <a:spAutoFit/>
+          </a:bodyPr>
+          <a:lstStyle/>
           <a:p>
             <a:pPr algn="l"/>
             <a:r>
-              <a:rPr sz="1200" b="0">
+              <a:rPr sz="1400" b="1">
+                <a:solidFill>
+                  <a:srgbClr val="0B2F5B"/>
+                </a:solidFill>
+                <a:latin typeface="Microsoft YaHei"/>
+              </a:rPr>
+              <a:t>联名信用卡（尚待确认）</a:t>
+            </a:r>
+          </a:p>
+        </p:txBody>
+      </p:sp>
+      <p:sp>
+        <p:nvSpPr>
+          <p:cNvPr id="15" name="TextBox 14"/>
+          <p:cNvSpPr txBox="1"/>
+          <p:nvPr/>
+        </p:nvSpPr>
+        <p:spPr>
+          <a:xfrm>
+            <a:off x="8321040" y="1645920"/>
+            <a:ext cx="3337560" cy="365760"/>
+          </a:xfrm>
+          <a:prstGeom prst="rect">
+            <a:avLst/>
+          </a:prstGeom>
+          <a:noFill/>
+        </p:spPr>
+        <p:txBody>
+          <a:bodyPr wrap="square" lIns="0" rIns="0" tIns="0" bIns="0" anchor="t">
+            <a:spAutoFit/>
+          </a:bodyPr>
+          <a:lstStyle/>
+          <a:p>
+            <a:pPr algn="l"/>
+            <a:r>
+              <a:rPr sz="1100" b="0">
                 <a:solidFill>
                   <a:srgbClr val="1F2A37"/>
                 </a:solidFill>
                 <a:latin typeface="Microsoft YaHei"/>
               </a:rPr>
-              <a:t>对方：WorkBuddy 为企业级AI应用及技能平台（约2.8万家企业客户，企业版日活超10万），适合中小微低成本体验入口。</a:t>
-            </a:r>
-          </a:p>
-        </p:txBody>
-      </p:sp>
-      <p:sp>
-        <p:nvSpPr>
-          <p:cNvPr id="9" name="Rounded Rectangle 8"/>
+              <a:t>泰隆银行 × WorkBuddy 联名卡获客</a:t>
+            </a:r>
+          </a:p>
+        </p:txBody>
+      </p:sp>
+      <p:sp>
+        <p:nvSpPr>
+          <p:cNvPr id="16" name="Rounded Rectangle 15"/>
           <p:cNvSpPr/>
           <p:nvPr/>
         </p:nvSpPr>
         <p:spPr>
           <a:xfrm>
-            <a:off x="411480" y="2103120"/>
-            <a:ext cx="2743200" cy="3840480"/>
+            <a:off x="365760" y="2377440"/>
+            <a:ext cx="2788920" cy="3657600"/>
           </a:xfrm>
           <a:prstGeom prst="roundRect">
             <a:avLst>
@@ -3784,14 +4039,14 @@
       </p:sp>
       <p:sp>
         <p:nvSpPr>
-          <p:cNvPr id="10" name="TextBox 9"/>
+          <p:cNvPr id="17" name="TextBox 16"/>
           <p:cNvSpPr txBox="1"/>
           <p:nvPr/>
         </p:nvSpPr>
         <p:spPr>
           <a:xfrm>
-            <a:off x="594360" y="2331720"/>
-            <a:ext cx="2377440" cy="320040"/>
+            <a:off x="530352" y="2606040"/>
+            <a:ext cx="2468880" cy="320040"/>
           </a:xfrm>
           <a:prstGeom prst="rect">
             <a:avLst/>
@@ -3812,21 +4067,21 @@
                 </a:solidFill>
                 <a:latin typeface="Microsoft YaHei"/>
               </a:rPr>
-              <a:t>已达成共识</a:t>
-            </a:r>
-          </a:p>
-        </p:txBody>
-      </p:sp>
-      <p:sp>
-        <p:nvSpPr>
-          <p:cNvPr id="11" name="TextBox 10"/>
+              <a:t>行外</a:t>
+            </a:r>
+          </a:p>
+        </p:txBody>
+      </p:sp>
+      <p:sp>
+        <p:nvSpPr>
+          <p:cNvPr id="18" name="TextBox 17"/>
           <p:cNvSpPr txBox="1"/>
           <p:nvPr/>
         </p:nvSpPr>
         <p:spPr>
           <a:xfrm>
-            <a:off x="594360" y="2743200"/>
-            <a:ext cx="2377440" cy="640080"/>
+            <a:off x="530352" y="3017520"/>
+            <a:ext cx="2468880" cy="822960"/>
           </a:xfrm>
           <a:prstGeom prst="rect">
             <a:avLst/>
@@ -3841,27 +4096,27 @@
           <a:p>
             <a:pPr algn="l"/>
             <a:r>
-              <a:rPr sz="2000" b="1">
+              <a:rPr sz="1800" b="1">
                 <a:solidFill>
                   <a:srgbClr val="FFFFFF"/>
                 </a:solidFill>
                 <a:latin typeface="Microsoft YaHei"/>
               </a:rPr>
-              <a:t>积分商城兑换</a:t>
-            </a:r>
-          </a:p>
-        </p:txBody>
-      </p:sp>
-      <p:sp>
-        <p:nvSpPr>
-          <p:cNvPr id="12" name="TextBox 11"/>
+              <a:t>积分商城 / 开户赠礼</a:t>
+            </a:r>
+          </a:p>
+        </p:txBody>
+      </p:sp>
+      <p:sp>
+        <p:nvSpPr>
+          <p:cNvPr id="19" name="TextBox 18"/>
           <p:cNvSpPr txBox="1"/>
           <p:nvPr/>
         </p:nvSpPr>
         <p:spPr>
           <a:xfrm>
-            <a:off x="594360" y="3566160"/>
-            <a:ext cx="2377440" cy="2011680"/>
+            <a:off x="530352" y="4023360"/>
+            <a:ext cx="2468880" cy="1737360"/>
           </a:xfrm>
           <a:prstGeom prst="rect">
             <a:avLst/>
@@ -3882,220 +4137,21 @@
                 </a:solidFill>
                 <a:latin typeface="Microsoft YaHei"/>
               </a:rPr>
-              <a:t>集中采购账号/额度/权益</a:t>
-            </a:r>
-          </a:p>
-          <a:p>
-            <a:pPr algn="l"/>
-            <a:r>
-              <a:rPr sz="1300" b="0">
-                <a:solidFill>
-                  <a:srgbClr val="F3F6FA"/>
-                </a:solidFill>
-                <a:latin typeface="Microsoft YaHei"/>
-              </a:rPr>
-              <a:t>上架积分商城兑换或购买</a:t>
-            </a:r>
-          </a:p>
-          <a:p>
-            <a:pPr algn="l"/>
-            <a:r>
-              <a:rPr sz="1300" b="0">
-                <a:solidFill>
-                  <a:srgbClr val="F3F6FA"/>
-                </a:solidFill>
-                <a:latin typeface="Microsoft YaHei"/>
-              </a:rPr>
-              <a:t>丰富积分消耗场景</a:t>
-            </a:r>
-          </a:p>
-        </p:txBody>
-      </p:sp>
-      <p:sp>
-        <p:nvSpPr>
-          <p:cNvPr id="13" name="Rounded Rectangle 12"/>
+              <a:t>集中采购上架兑换；开户拜访以AI权益替代部分实物礼品；兑换码自助激活</a:t>
+            </a:r>
+          </a:p>
+        </p:txBody>
+      </p:sp>
+      <p:sp>
+        <p:nvSpPr>
+          <p:cNvPr id="20" name="Rounded Rectangle 19"/>
           <p:cNvSpPr/>
           <p:nvPr/>
         </p:nvSpPr>
         <p:spPr>
           <a:xfrm>
-            <a:off x="3337560" y="2103120"/>
-            <a:ext cx="2743200" cy="3840480"/>
-          </a:xfrm>
-          <a:prstGeom prst="roundRect">
-            <a:avLst>
-              <a:gd name="adj" fmla="val 8000"/>
-            </a:avLst>
-          </a:prstGeom>
-          <a:solidFill>
-            <a:srgbClr val="0B2F5B"/>
-          </a:solidFill>
-          <a:ln>
-            <a:noFill/>
-          </a:ln>
-          <a:effectLst/>
-        </p:spPr>
-        <p:style>
-          <a:lnRef idx="1">
-            <a:schemeClr val="accent1"/>
-          </a:lnRef>
-          <a:fillRef idx="3">
-            <a:schemeClr val="accent1"/>
-          </a:fillRef>
-          <a:effectRef idx="2">
-            <a:schemeClr val="accent1"/>
-          </a:effectRef>
-          <a:fontRef idx="minor">
-            <a:schemeClr val="lt1"/>
-          </a:fontRef>
-        </p:style>
-        <p:txBody>
-          <a:bodyPr rtlCol="0" anchor="ctr"/>
-          <a:lstStyle/>
-          <a:p>
-            <a:pPr algn="ctr"/>
-          </a:p>
-        </p:txBody>
-      </p:sp>
-      <p:sp>
-        <p:nvSpPr>
-          <p:cNvPr id="14" name="TextBox 13"/>
-          <p:cNvSpPr txBox="1"/>
-          <p:nvPr/>
-        </p:nvSpPr>
-        <p:spPr>
-          <a:xfrm>
-            <a:off x="3520440" y="2331720"/>
-            <a:ext cx="2377440" cy="320040"/>
-          </a:xfrm>
-          <a:prstGeom prst="rect">
-            <a:avLst/>
-          </a:prstGeom>
-          <a:noFill/>
-        </p:spPr>
-        <p:txBody>
-          <a:bodyPr wrap="square" lIns="0" rIns="0" tIns="0" bIns="0" anchor="t">
-            <a:spAutoFit/>
-          </a:bodyPr>
-          <a:lstStyle/>
-          <a:p>
-            <a:pPr algn="l"/>
-            <a:r>
-              <a:rPr sz="1200" b="1">
-                <a:solidFill>
-                  <a:srgbClr val="C4A35A"/>
-                </a:solidFill>
-                <a:latin typeface="Microsoft YaHei"/>
-              </a:rPr>
-              <a:t>已达成共识</a:t>
-            </a:r>
-          </a:p>
-        </p:txBody>
-      </p:sp>
-      <p:sp>
-        <p:nvSpPr>
-          <p:cNvPr id="15" name="TextBox 14"/>
-          <p:cNvSpPr txBox="1"/>
-          <p:nvPr/>
-        </p:nvSpPr>
-        <p:spPr>
-          <a:xfrm>
-            <a:off x="3520440" y="2743200"/>
-            <a:ext cx="2377440" cy="640080"/>
-          </a:xfrm>
-          <a:prstGeom prst="rect">
-            <a:avLst/>
-          </a:prstGeom>
-          <a:noFill/>
-        </p:spPr>
-        <p:txBody>
-          <a:bodyPr wrap="square" lIns="0" rIns="0" tIns="0" bIns="0" anchor="t">
-            <a:spAutoFit/>
-          </a:bodyPr>
-          <a:lstStyle/>
-          <a:p>
-            <a:pPr algn="l"/>
-            <a:r>
-              <a:rPr sz="2000" b="1">
-                <a:solidFill>
-                  <a:srgbClr val="FFFFFF"/>
-                </a:solidFill>
-                <a:latin typeface="Microsoft YaHei"/>
-              </a:rPr>
-              <a:t>开户/拜访赠礼</a:t>
-            </a:r>
-          </a:p>
-        </p:txBody>
-      </p:sp>
-      <p:sp>
-        <p:nvSpPr>
-          <p:cNvPr id="16" name="TextBox 15"/>
-          <p:cNvSpPr txBox="1"/>
-          <p:nvPr/>
-        </p:nvSpPr>
-        <p:spPr>
-          <a:xfrm>
-            <a:off x="3520440" y="3566160"/>
-            <a:ext cx="2377440" cy="2011680"/>
-          </a:xfrm>
-          <a:prstGeom prst="rect">
-            <a:avLst/>
-          </a:prstGeom>
-          <a:noFill/>
-        </p:spPr>
-        <p:txBody>
-          <a:bodyPr wrap="square" lIns="0" rIns="0" tIns="0" bIns="0" anchor="t">
-            <a:spAutoFit/>
-          </a:bodyPr>
-          <a:lstStyle/>
-          <a:p>
-            <a:pPr algn="l"/>
-            <a:r>
-              <a:rPr sz="1300" b="0">
-                <a:solidFill>
-                  <a:srgbClr val="F3F6FA"/>
-                </a:solidFill>
-                <a:latin typeface="Microsoft YaHei"/>
-              </a:rPr>
-              <a:t>以AI账号或额度替代部分</a:t>
-            </a:r>
-          </a:p>
-          <a:p>
-            <a:pPr algn="l"/>
-            <a:r>
-              <a:rPr sz="1300" b="0">
-                <a:solidFill>
-                  <a:srgbClr val="F3F6FA"/>
-                </a:solidFill>
-                <a:latin typeface="Microsoft YaHei"/>
-              </a:rPr>
-              <a:t>实物礼品；兑换码自助激活</a:t>
-            </a:r>
-          </a:p>
-          <a:p>
-            <a:pPr algn="l"/>
-            <a:r>
-              <a:rPr sz="1300" b="0">
-                <a:solidFill>
-                  <a:srgbClr val="F3F6FA"/>
-                </a:solidFill>
-                <a:latin typeface="Microsoft YaHei"/>
-              </a:rPr>
-              <a:t>提升拜访体验与开户转化</a:t>
-            </a:r>
-          </a:p>
-        </p:txBody>
-      </p:sp>
-      <p:sp>
-        <p:nvSpPr>
-          <p:cNvPr id="17" name="Rounded Rectangle 16"/>
-          <p:cNvSpPr/>
-          <p:nvPr/>
-        </p:nvSpPr>
-        <p:spPr>
-          <a:xfrm>
-            <a:off x="6263640" y="2103120"/>
-            <a:ext cx="2743200" cy="3840480"/>
+            <a:off x="3291840" y="2377440"/>
+            <a:ext cx="2788920" cy="3657600"/>
           </a:xfrm>
           <a:prstGeom prst="roundRect">
             <a:avLst>
@@ -4134,14 +4190,14 @@
       </p:sp>
       <p:sp>
         <p:nvSpPr>
-          <p:cNvPr id="18" name="TextBox 17"/>
+          <p:cNvPr id="21" name="TextBox 20"/>
           <p:cNvSpPr txBox="1"/>
           <p:nvPr/>
         </p:nvSpPr>
         <p:spPr>
           <a:xfrm>
-            <a:off x="6446520" y="2331720"/>
-            <a:ext cx="2377440" cy="320040"/>
+            <a:off x="3456432" y="2606040"/>
+            <a:ext cx="2468880" cy="320040"/>
           </a:xfrm>
           <a:prstGeom prst="rect">
             <a:avLst/>
@@ -4162,21 +4218,21 @@
                 </a:solidFill>
                 <a:latin typeface="Microsoft YaHei"/>
               </a:rPr>
-              <a:t>初步方案</a:t>
-            </a:r>
-          </a:p>
-        </p:txBody>
-      </p:sp>
-      <p:sp>
-        <p:nvSpPr>
-          <p:cNvPr id="19" name="TextBox 18"/>
+              <a:t>行内①</a:t>
+            </a:r>
+          </a:p>
+        </p:txBody>
+      </p:sp>
+      <p:sp>
+        <p:nvSpPr>
+          <p:cNvPr id="22" name="TextBox 21"/>
           <p:cNvSpPr txBox="1"/>
           <p:nvPr/>
         </p:nvSpPr>
         <p:spPr>
           <a:xfrm>
-            <a:off x="6446520" y="2743200"/>
-            <a:ext cx="2377440" cy="640080"/>
+            <a:off x="3456432" y="3017520"/>
+            <a:ext cx="2468880" cy="822960"/>
           </a:xfrm>
           <a:prstGeom prst="rect">
             <a:avLst/>
@@ -4191,27 +4247,27 @@
           <a:p>
             <a:pPr algn="l"/>
             <a:r>
-              <a:rPr sz="2000" b="1">
+              <a:rPr sz="1800" b="1">
                 <a:solidFill>
                   <a:srgbClr val="0B2F5B"/>
                 </a:solidFill>
                 <a:latin typeface="Microsoft YaHei"/>
               </a:rPr>
-              <a:t>联合推广</a:t>
-            </a:r>
-          </a:p>
-        </p:txBody>
-      </p:sp>
-      <p:sp>
-        <p:nvSpPr>
-          <p:cNvPr id="20" name="TextBox 19"/>
+              <a:t>办公提效系统/小程序</a:t>
+            </a:r>
+          </a:p>
+        </p:txBody>
+      </p:sp>
+      <p:sp>
+        <p:nvSpPr>
+          <p:cNvPr id="23" name="TextBox 22"/>
           <p:cNvSpPr txBox="1"/>
           <p:nvPr/>
         </p:nvSpPr>
         <p:spPr>
           <a:xfrm>
-            <a:off x="6446520" y="3566160"/>
-            <a:ext cx="2377440" cy="2011680"/>
+            <a:off x="3456432" y="4023360"/>
+            <a:ext cx="2468880" cy="1737360"/>
           </a:xfrm>
           <a:prstGeom prst="rect">
             <a:avLst/>
@@ -4232,45 +4288,21 @@
                 </a:solidFill>
                 <a:latin typeface="Microsoft YaHei"/>
               </a:rPr>
-              <a:t>依托130余网点与客户经理</a:t>
-            </a:r>
-          </a:p>
-          <a:p>
-            <a:pPr algn="l"/>
-            <a:r>
-              <a:rPr sz="1300" b="0">
-                <a:solidFill>
-                  <a:srgbClr val="1F2A37"/>
-                </a:solidFill>
-                <a:latin typeface="Microsoft YaHei"/>
-              </a:rPr>
-              <a:t>面向制造业、商贸等客群试点</a:t>
-            </a:r>
-          </a:p>
-          <a:p>
-            <a:pPr algn="l"/>
-            <a:r>
-              <a:rPr sz="1300" b="0">
-                <a:solidFill>
-                  <a:srgbClr val="1F2A37"/>
-                </a:solidFill>
-                <a:latin typeface="Microsoft YaHei"/>
-              </a:rPr>
-              <a:t>腾讯负责产品与技术支持</a:t>
-            </a:r>
-          </a:p>
-        </p:txBody>
-      </p:sp>
-      <p:sp>
-        <p:nvSpPr>
-          <p:cNvPr id="21" name="Rounded Rectangle 20"/>
+              <a:t>与WorkBuddy联手打造内部办公提效工具，覆盖起草、纪要、知识检索等场景</a:t>
+            </a:r>
+          </a:p>
+        </p:txBody>
+      </p:sp>
+      <p:sp>
+        <p:nvSpPr>
+          <p:cNvPr id="24" name="Rounded Rectangle 23"/>
           <p:cNvSpPr/>
           <p:nvPr/>
         </p:nvSpPr>
         <p:spPr>
           <a:xfrm>
-            <a:off x="9189720" y="2103120"/>
-            <a:ext cx="2743200" cy="3840480"/>
+            <a:off x="6217920" y="2377440"/>
+            <a:ext cx="2788920" cy="3657600"/>
           </a:xfrm>
           <a:prstGeom prst="roundRect">
             <a:avLst>
@@ -4309,14 +4341,14 @@
       </p:sp>
       <p:sp>
         <p:nvSpPr>
-          <p:cNvPr id="22" name="TextBox 21"/>
+          <p:cNvPr id="25" name="TextBox 24"/>
           <p:cNvSpPr txBox="1"/>
           <p:nvPr/>
         </p:nvSpPr>
         <p:spPr>
           <a:xfrm>
-            <a:off x="9372600" y="2331720"/>
-            <a:ext cx="2377440" cy="320040"/>
+            <a:off x="6382512" y="2606040"/>
+            <a:ext cx="2468880" cy="320040"/>
           </a:xfrm>
           <a:prstGeom prst="rect">
             <a:avLst/>
@@ -4333,25 +4365,25 @@
             <a:r>
               <a:rPr sz="1200" b="1">
                 <a:solidFill>
-                  <a:srgbClr val="5C6B7A"/>
-                </a:solidFill>
-                <a:latin typeface="Microsoft YaHei"/>
-              </a:rPr>
-              <a:t>后续延伸</a:t>
-            </a:r>
-          </a:p>
-        </p:txBody>
-      </p:sp>
-      <p:sp>
-        <p:nvSpPr>
-          <p:cNvPr id="23" name="TextBox 22"/>
+                  <a:srgbClr val="0B2F5B"/>
+                </a:solidFill>
+                <a:latin typeface="Microsoft YaHei"/>
+              </a:rPr>
+              <a:t>行内②</a:t>
+            </a:r>
+          </a:p>
+        </p:txBody>
+      </p:sp>
+      <p:sp>
+        <p:nvSpPr>
+          <p:cNvPr id="26" name="TextBox 25"/>
           <p:cNvSpPr txBox="1"/>
           <p:nvPr/>
         </p:nvSpPr>
         <p:spPr>
           <a:xfrm>
-            <a:off x="9372600" y="2743200"/>
-            <a:ext cx="2377440" cy="640080"/>
+            <a:off x="6382512" y="3017520"/>
+            <a:ext cx="2468880" cy="822960"/>
           </a:xfrm>
           <a:prstGeom prst="rect">
             <a:avLst/>
@@ -4366,27 +4398,27 @@
           <a:p>
             <a:pPr algn="l"/>
             <a:r>
-              <a:rPr sz="2000" b="1">
+              <a:rPr sz="1800" b="1">
                 <a:solidFill>
                   <a:srgbClr val="0B2F5B"/>
                 </a:solidFill>
                 <a:latin typeface="Microsoft YaHei"/>
               </a:rPr>
-              <a:t>平台专区等</a:t>
-            </a:r>
-          </a:p>
-        </p:txBody>
-      </p:sp>
-      <p:sp>
-        <p:nvSpPr>
-          <p:cNvPr id="24" name="TextBox 23"/>
+              <a:t>员工AI福利发放</a:t>
+            </a:r>
+          </a:p>
+        </p:txBody>
+      </p:sp>
+      <p:sp>
+        <p:nvSpPr>
+          <p:cNvPr id="27" name="TextBox 26"/>
           <p:cNvSpPr txBox="1"/>
           <p:nvPr/>
         </p:nvSpPr>
         <p:spPr>
           <a:xfrm>
-            <a:off x="9372600" y="3566160"/>
-            <a:ext cx="2377440" cy="2011680"/>
+            <a:off x="6382512" y="4023360"/>
+            <a:ext cx="2468880" cy="1737360"/>
           </a:xfrm>
           <a:prstGeom prst="rect">
             <a:avLst/>
@@ -4407,45 +4439,67 @@
                 </a:solidFill>
                 <a:latin typeface="Microsoft YaHei"/>
               </a:rPr>
-              <a:t>开设泰隆银行专区</a:t>
-            </a:r>
-          </a:p>
-          <a:p>
-            <a:pPr algn="l"/>
-            <a:r>
-              <a:rPr sz="1300" b="0">
-                <a:solidFill>
-                  <a:srgbClr val="1F2A37"/>
-                </a:solidFill>
-                <a:latin typeface="Microsoft YaHei"/>
-              </a:rPr>
-              <a:t>联合开发行业AI技能</a:t>
-            </a:r>
-          </a:p>
-          <a:p>
-            <a:pPr algn="l"/>
-            <a:r>
-              <a:rPr sz="1300" b="0">
-                <a:solidFill>
-                  <a:srgbClr val="1F2A37"/>
-                </a:solidFill>
-                <a:latin typeface="Microsoft YaHei"/>
-              </a:rPr>
-              <a:t>与开户/结算/代发结合</a:t>
-            </a:r>
-          </a:p>
-        </p:txBody>
-      </p:sp>
-      <p:sp>
-        <p:nvSpPr>
-          <p:cNvPr id="25" name="TextBox 24"/>
+              <a:t>以福利形式向行员发放账号/额度，提升个人AI使用能力；单独预留员工份额</a:t>
+            </a:r>
+          </a:p>
+        </p:txBody>
+      </p:sp>
+      <p:sp>
+        <p:nvSpPr>
+          <p:cNvPr id="28" name="Rounded Rectangle 27"/>
+          <p:cNvSpPr/>
+          <p:nvPr/>
+        </p:nvSpPr>
+        <p:spPr>
+          <a:xfrm>
+            <a:off x="9144000" y="2377440"/>
+            <a:ext cx="2788920" cy="3657600"/>
+          </a:xfrm>
+          <a:prstGeom prst="roundRect">
+            <a:avLst>
+              <a:gd name="adj" fmla="val 8000"/>
+            </a:avLst>
+          </a:prstGeom>
+          <a:solidFill>
+            <a:srgbClr val="E8EEF5"/>
+          </a:solidFill>
+          <a:ln>
+            <a:noFill/>
+          </a:ln>
+          <a:effectLst/>
+        </p:spPr>
+        <p:style>
+          <a:lnRef idx="1">
+            <a:schemeClr val="accent1"/>
+          </a:lnRef>
+          <a:fillRef idx="3">
+            <a:schemeClr val="accent1"/>
+          </a:fillRef>
+          <a:effectRef idx="2">
+            <a:schemeClr val="accent1"/>
+          </a:effectRef>
+          <a:fontRef idx="minor">
+            <a:schemeClr val="lt1"/>
+          </a:fontRef>
+        </p:style>
+        <p:txBody>
+          <a:bodyPr rtlCol="0" anchor="ctr"/>
+          <a:lstStyle/>
+          <a:p>
+            <a:pPr algn="ctr"/>
+          </a:p>
+        </p:txBody>
+      </p:sp>
+      <p:sp>
+        <p:nvSpPr>
+          <p:cNvPr id="29" name="TextBox 28"/>
           <p:cNvSpPr txBox="1"/>
           <p:nvPr/>
         </p:nvSpPr>
         <p:spPr>
           <a:xfrm>
-            <a:off x="457200" y="6510528"/>
-            <a:ext cx="9601200" cy="256032"/>
+            <a:off x="9308592" y="2606040"/>
+            <a:ext cx="2468880" cy="320040"/>
           </a:xfrm>
           <a:prstGeom prst="rect">
             <a:avLst/>
@@ -4460,6 +4514,111 @@
           <a:p>
             <a:pPr algn="l"/>
             <a:r>
+              <a:rPr sz="1200" b="1">
+                <a:solidFill>
+                  <a:srgbClr val="0B2F5B"/>
+                </a:solidFill>
+                <a:latin typeface="Microsoft YaHei"/>
+              </a:rPr>
+              <a:t>对外</a:t>
+            </a:r>
+          </a:p>
+        </p:txBody>
+      </p:sp>
+      <p:sp>
+        <p:nvSpPr>
+          <p:cNvPr id="30" name="TextBox 29"/>
+          <p:cNvSpPr txBox="1"/>
+          <p:nvPr/>
+        </p:nvSpPr>
+        <p:spPr>
+          <a:xfrm>
+            <a:off x="9308592" y="3017520"/>
+            <a:ext cx="2468880" cy="822960"/>
+          </a:xfrm>
+          <a:prstGeom prst="rect">
+            <a:avLst/>
+          </a:prstGeom>
+          <a:noFill/>
+        </p:spPr>
+        <p:txBody>
+          <a:bodyPr wrap="square" lIns="0" rIns="0" tIns="0" bIns="0" anchor="t">
+            <a:spAutoFit/>
+          </a:bodyPr>
+          <a:lstStyle/>
+          <a:p>
+            <a:pPr algn="l"/>
+            <a:r>
+              <a:rPr sz="1800" b="1">
+                <a:solidFill>
+                  <a:srgbClr val="0B2F5B"/>
+                </a:solidFill>
+                <a:latin typeface="Microsoft YaHei"/>
+              </a:rPr>
+              <a:t>联名信用卡</a:t>
+            </a:r>
+          </a:p>
+        </p:txBody>
+      </p:sp>
+      <p:sp>
+        <p:nvSpPr>
+          <p:cNvPr id="31" name="TextBox 30"/>
+          <p:cNvSpPr txBox="1"/>
+          <p:nvPr/>
+        </p:nvSpPr>
+        <p:spPr>
+          <a:xfrm>
+            <a:off x="9308592" y="4023360"/>
+            <a:ext cx="2468880" cy="1737360"/>
+          </a:xfrm>
+          <a:prstGeom prst="rect">
+            <a:avLst/>
+          </a:prstGeom>
+          <a:noFill/>
+        </p:spPr>
+        <p:txBody>
+          <a:bodyPr wrap="square" lIns="0" rIns="0" tIns="0" bIns="0" anchor="t">
+            <a:spAutoFit/>
+          </a:bodyPr>
+          <a:lstStyle/>
+          <a:p>
+            <a:pPr algn="l"/>
+            <a:r>
+              <a:rPr sz="1300" b="0">
+                <a:solidFill>
+                  <a:srgbClr val="1F2A37"/>
+                </a:solidFill>
+                <a:latin typeface="Microsoft YaHei"/>
+              </a:rPr>
+              <a:t>原则同意研究联名卡方案，AI权益绑定办卡激活与消费，扩大零售获客</a:t>
+            </a:r>
+          </a:p>
+        </p:txBody>
+      </p:sp>
+      <p:sp>
+        <p:nvSpPr>
+          <p:cNvPr id="32" name="TextBox 31"/>
+          <p:cNvSpPr txBox="1"/>
+          <p:nvPr/>
+        </p:nvSpPr>
+        <p:spPr>
+          <a:xfrm>
+            <a:off x="457200" y="6510528"/>
+            <a:ext cx="9601200" cy="256032"/>
+          </a:xfrm>
+          <a:prstGeom prst="rect">
+            <a:avLst/>
+          </a:prstGeom>
+          <a:noFill/>
+        </p:spPr>
+        <p:txBody>
+          <a:bodyPr wrap="square" lIns="0" rIns="0" tIns="0" bIns="0" anchor="t">
+            <a:spAutoFit/>
+          </a:bodyPr>
+          <a:lstStyle/>
+          <a:p>
+            <a:pPr algn="l"/>
+            <a:r>
               <a:rPr sz="1000" b="0">
                 <a:solidFill>
                   <a:srgbClr val="5C6B7A"/>
@@ -4473,7 +4632,7 @@
       </p:sp>
       <p:sp>
         <p:nvSpPr>
-          <p:cNvPr id="26" name="TextBox 25"/>
+          <p:cNvPr id="33" name="TextBox 32"/>
           <p:cNvSpPr txBox="1"/>
           <p:nvPr/>
         </p:nvSpPr>
@@ -4721,7 +4880,7 @@
                 </a:solidFill>
                 <a:latin typeface="Microsoft YaHei"/>
               </a:rPr>
-              <a:t>1,500万元为测算框架，非采购承诺；首期建议300万/500万两档论证</a:t>
+              <a:t>行员采购 + 行外采购双轨；1,500万为测算框架，非采购承诺</a:t>
             </a:r>
           </a:p>
         </p:txBody>
@@ -4815,8 +4974,8 @@
         </p:nvSpPr>
         <p:spPr>
           <a:xfrm>
-            <a:off x="685800" y="1874519"/>
-            <a:ext cx="5212080" cy="822960"/>
+            <a:off x="685800" y="1828800"/>
+            <a:ext cx="5212080" cy="804672"/>
           </a:xfrm>
           <a:prstGeom prst="roundRect">
             <a:avLst>
@@ -4861,8 +5020,8 @@
         </p:nvSpPr>
         <p:spPr>
           <a:xfrm>
-            <a:off x="685800" y="1874519"/>
-            <a:ext cx="109728" cy="822960"/>
+            <a:off x="685800" y="1828800"/>
+            <a:ext cx="109728" cy="804672"/>
           </a:xfrm>
           <a:prstGeom prst="rect">
             <a:avLst/>
@@ -4905,8 +5064,8 @@
         </p:nvSpPr>
         <p:spPr>
           <a:xfrm>
-            <a:off x="1005840" y="1984247"/>
-            <a:ext cx="4663440" cy="365760"/>
+            <a:off x="1005840" y="1920240"/>
+            <a:ext cx="4663440" cy="320040"/>
           </a:xfrm>
           <a:prstGeom prst="rect">
             <a:avLst/>
@@ -4921,7 +5080,7 @@
           <a:p>
             <a:pPr algn="l"/>
             <a:r>
-              <a:rPr sz="1800" b="1">
+              <a:rPr sz="1700" b="1">
                 <a:solidFill>
                   <a:srgbClr val="0B2F5B"/>
                 </a:solidFill>
@@ -4940,7 +5099,7 @@
         </p:nvSpPr>
         <p:spPr>
           <a:xfrm>
-            <a:off x="1005840" y="2331719"/>
+            <a:off x="1005840" y="2267712"/>
             <a:ext cx="4663440" cy="274320"/>
           </a:xfrm>
           <a:prstGeom prst="rect">
@@ -4962,7 +5121,7 @@
                 </a:solidFill>
                 <a:latin typeface="Microsoft YaHei"/>
               </a:rPr>
-              <a:t>总体方案设计上限</a:t>
+              <a:t>总体方案设计上限；三阶段×约500万</a:t>
             </a:r>
           </a:p>
         </p:txBody>
@@ -4975,8 +5134,8 @@
         </p:nvSpPr>
         <p:spPr>
           <a:xfrm>
-            <a:off x="685800" y="2834639"/>
-            <a:ext cx="5212080" cy="822960"/>
+            <a:off x="685800" y="2743200"/>
+            <a:ext cx="5212080" cy="804672"/>
           </a:xfrm>
           <a:prstGeom prst="roundRect">
             <a:avLst>
@@ -5021,8 +5180,8 @@
         </p:nvSpPr>
         <p:spPr>
           <a:xfrm>
-            <a:off x="685800" y="2834639"/>
-            <a:ext cx="109728" cy="822960"/>
+            <a:off x="685800" y="2743200"/>
+            <a:ext cx="109728" cy="804672"/>
           </a:xfrm>
           <a:prstGeom prst="rect">
             <a:avLst/>
@@ -5065,8 +5224,8 @@
         </p:nvSpPr>
         <p:spPr>
           <a:xfrm>
-            <a:off x="1005840" y="2944367"/>
-            <a:ext cx="4663440" cy="365760"/>
+            <a:off x="1005840" y="2834640"/>
+            <a:ext cx="4663440" cy="320040"/>
           </a:xfrm>
           <a:prstGeom prst="rect">
             <a:avLst/>
@@ -5081,13 +5240,13 @@
           <a:p>
             <a:pPr algn="l"/>
             <a:r>
-              <a:rPr sz="1800" b="1">
+              <a:rPr sz="1700" b="1">
                 <a:solidFill>
                   <a:srgbClr val="0B2F5B"/>
                 </a:solidFill>
                 <a:latin typeface="Microsoft YaHei"/>
               </a:rPr>
-              <a:t>三阶段 × 约500万</a:t>
+              <a:t>首期300–500万</a:t>
             </a:r>
           </a:p>
         </p:txBody>
@@ -5100,7 +5259,7 @@
         </p:nvSpPr>
         <p:spPr>
           <a:xfrm>
-            <a:off x="1005840" y="3291839"/>
+            <a:off x="1005840" y="3182112"/>
             <a:ext cx="4663440" cy="274320"/>
           </a:xfrm>
           <a:prstGeom prst="rect">
@@ -5122,7 +5281,7 @@
                 </a:solidFill>
                 <a:latin typeface="Microsoft YaHei"/>
               </a:rPr>
-              <a:t>按阶段推进与验收</a:t>
+              <a:t>明确行外/行员份额比例后再审批</a:t>
             </a:r>
           </a:p>
         </p:txBody>
@@ -5135,8 +5294,8 @@
         </p:nvSpPr>
         <p:spPr>
           <a:xfrm>
-            <a:off x="685800" y="3794760"/>
-            <a:ext cx="5212080" cy="822960"/>
+            <a:off x="685800" y="3657600"/>
+            <a:ext cx="5212080" cy="804672"/>
           </a:xfrm>
           <a:prstGeom prst="roundRect">
             <a:avLst>
@@ -5181,8 +5340,8 @@
         </p:nvSpPr>
         <p:spPr>
           <a:xfrm>
-            <a:off x="685800" y="3794760"/>
-            <a:ext cx="109728" cy="822960"/>
+            <a:off x="685800" y="3657600"/>
+            <a:ext cx="109728" cy="804672"/>
           </a:xfrm>
           <a:prstGeom prst="rect">
             <a:avLst/>
@@ -5225,8 +5384,8 @@
         </p:nvSpPr>
         <p:spPr>
           <a:xfrm>
-            <a:off x="1005840" y="3904488"/>
-            <a:ext cx="4663440" cy="365760"/>
+            <a:off x="1005840" y="3749040"/>
+            <a:ext cx="4663440" cy="320040"/>
           </a:xfrm>
           <a:prstGeom prst="rect">
             <a:avLst/>
@@ -5241,13 +5400,13 @@
           <a:p>
             <a:pPr algn="l"/>
             <a:r>
-              <a:rPr sz="1800" b="1">
+              <a:rPr sz="1700" b="1">
                 <a:solidFill>
                   <a:srgbClr val="0B2F5B"/>
                 </a:solidFill>
                 <a:latin typeface="Microsoft YaHei"/>
               </a:rPr>
-              <a:t>首期300–500万</a:t>
+              <a:t>双轨拆分核算</a:t>
             </a:r>
           </a:p>
         </p:txBody>
@@ -5260,7 +5419,7 @@
         </p:nvSpPr>
         <p:spPr>
           <a:xfrm>
-            <a:off x="1005840" y="4251960"/>
+            <a:off x="1005840" y="4096512"/>
             <a:ext cx="4663440" cy="274320"/>
           </a:xfrm>
           <a:prstGeom prst="rect">
@@ -5282,7 +5441,7 @@
                 </a:solidFill>
                 <a:latin typeface="Microsoft YaHei"/>
               </a:rPr>
-              <a:t>待报价与试点测算</a:t>
+              <a:t>行外：客户权益；行员：提效+福利</a:t>
             </a:r>
           </a:p>
         </p:txBody>
@@ -5295,8 +5454,8 @@
         </p:nvSpPr>
         <p:spPr>
           <a:xfrm>
-            <a:off x="685800" y="4892040"/>
-            <a:ext cx="5212080" cy="1005840"/>
+            <a:off x="685800" y="4754880"/>
+            <a:ext cx="5212080" cy="1188720"/>
           </a:xfrm>
           <a:prstGeom prst="rect">
             <a:avLst/>
@@ -5317,7 +5476,7 @@
                 </a:solidFill>
                 <a:latin typeface="Microsoft YaHei"/>
               </a:rPr>
-              <a:t>尚待腾讯提供：账号/License/Token数量、有效期、</a:t>
+              <a:t>尚待腾讯提供：行外/行员可分配数量、有效期、阶梯折扣、</a:t>
             </a:r>
           </a:p>
           <a:p>
@@ -5329,7 +5488,7 @@
                 </a:solidFill>
                 <a:latin typeface="Microsoft YaHei"/>
               </a:rPr>
-              <a:t>阶梯折扣、未激活处理、扩容续费退款、付款与验收。</a:t>
+              <a:t>未激活处理、付款验收；另需内部系统开发范围及联名卡权益包。</a:t>
             </a:r>
           </a:p>
         </p:txBody>
@@ -5423,8 +5582,8 @@
         </p:nvSpPr>
         <p:spPr>
           <a:xfrm>
-            <a:off x="6675120" y="1920240"/>
-            <a:ext cx="4846320" cy="3657600"/>
+            <a:off x="6675120" y="1874519"/>
+            <a:ext cx="4846320" cy="3931920"/>
           </a:xfrm>
           <a:prstGeom prst="rect">
             <a:avLst/>
@@ -5439,11 +5598,11 @@
           <a:p>
             <a:pPr algn="l">
               <a:lnSpc>
-                <a:spcPct val="155000"/>
+                <a:spcPct val="145000"/>
               </a:lnSpc>
             </a:pPr>
             <a:r>
-              <a:rPr sz="1400" b="0">
+              <a:rPr sz="1300" b="0">
                 <a:solidFill>
                   <a:srgbClr val="C4A35A"/>
                 </a:solidFill>
@@ -5452,7 +5611,7 @@
               <a:t>●  </a:t>
             </a:r>
             <a:r>
-              <a:rPr sz="1400" b="0">
+              <a:rPr sz="1300" b="0">
                 <a:solidFill>
                   <a:srgbClr val="FFFFFF"/>
                 </a:solidFill>
@@ -5464,11 +5623,11 @@
           <a:p>
             <a:pPr algn="l">
               <a:lnSpc>
-                <a:spcPct val="155000"/>
+                <a:spcPct val="145000"/>
               </a:lnSpc>
             </a:pPr>
             <a:r>
-              <a:rPr sz="1400" b="0">
+              <a:rPr sz="1300" b="0">
                 <a:solidFill>
                   <a:srgbClr val="C4A35A"/>
                 </a:solidFill>
@@ -5477,23 +5636,23 @@
               <a:t>●  </a:t>
             </a:r>
             <a:r>
-              <a:rPr sz="1400" b="0">
+              <a:rPr sz="1300" b="0">
                 <a:solidFill>
                   <a:srgbClr val="FFFFFF"/>
                 </a:solidFill>
                 <a:latin typeface="Microsoft YaHei"/>
               </a:rPr>
-              <a:t>提升存量客户黏性：触达老板/财务关键人</a:t>
+              <a:t>提升存量客户黏性与积分活跃</a:t>
             </a:r>
           </a:p>
           <a:p>
             <a:pPr algn="l">
               <a:lnSpc>
-                <a:spcPct val="155000"/>
+                <a:spcPct val="145000"/>
               </a:lnSpc>
             </a:pPr>
             <a:r>
-              <a:rPr sz="1400" b="0">
+              <a:rPr sz="1300" b="0">
                 <a:solidFill>
                   <a:srgbClr val="C4A35A"/>
                 </a:solidFill>
@@ -5502,23 +5661,23 @@
               <a:t>●  </a:t>
             </a:r>
             <a:r>
-              <a:rPr sz="1400" b="0">
+              <a:rPr sz="1300" b="0">
                 <a:solidFill>
                   <a:srgbClr val="FFFFFF"/>
                 </a:solidFill>
                 <a:latin typeface="Microsoft YaHei"/>
               </a:rPr>
-              <a:t>促进积分活跃：补充企业服务类权益</a:t>
+              <a:t>带动结算与资金沉淀：商城/续费走我行账户</a:t>
             </a:r>
           </a:p>
           <a:p>
             <a:pPr algn="l">
               <a:lnSpc>
-                <a:spcPct val="155000"/>
+                <a:spcPct val="145000"/>
               </a:lnSpc>
             </a:pPr>
             <a:r>
-              <a:rPr sz="1400" b="0">
+              <a:rPr sz="1300" b="0">
                 <a:solidFill>
                   <a:srgbClr val="C4A35A"/>
                 </a:solidFill>
@@ -5527,23 +5686,23 @@
               <a:t>●  </a:t>
             </a:r>
             <a:r>
-              <a:rPr sz="1400" b="0">
+              <a:rPr sz="1300" b="0">
                 <a:solidFill>
                   <a:srgbClr val="FFFFFF"/>
                 </a:solidFill>
                 <a:latin typeface="Microsoft YaHei"/>
               </a:rPr>
-              <a:t>带动结算与资金沉淀：商城/续费走我行账户</a:t>
+              <a:t>提升行内办公效率与员工AI能力</a:t>
             </a:r>
           </a:p>
           <a:p>
             <a:pPr algn="l">
               <a:lnSpc>
-                <a:spcPct val="155000"/>
+                <a:spcPct val="145000"/>
               </a:lnSpc>
             </a:pPr>
             <a:r>
-              <a:rPr sz="1400" b="0">
+              <a:rPr sz="1300" b="0">
                 <a:solidFill>
                   <a:srgbClr val="C4A35A"/>
                 </a:solidFill>
@@ -5552,13 +5711,38 @@
               <a:t>●  </a:t>
             </a:r>
             <a:r>
-              <a:rPr sz="1400" b="0">
+              <a:rPr sz="1300" b="0">
                 <a:solidFill>
                   <a:srgbClr val="FFFFFF"/>
                 </a:solidFill>
                 <a:latin typeface="Microsoft YaHei"/>
               </a:rPr>
-              <a:t>塑造科技服务品牌：金融+经营赋能形象</a:t>
+              <a:t>联名信用卡获客与品牌曝光</a:t>
+            </a:r>
+          </a:p>
+          <a:p>
+            <a:pPr algn="l">
+              <a:lnSpc>
+                <a:spcPct val="145000"/>
+              </a:lnSpc>
+            </a:pPr>
+            <a:r>
+              <a:rPr sz="1300" b="0">
+                <a:solidFill>
+                  <a:srgbClr val="C4A35A"/>
+                </a:solidFill>
+                <a:latin typeface="Microsoft YaHei"/>
+              </a:rPr>
+              <a:t>●  </a:t>
+            </a:r>
+            <a:r>
+              <a:rPr sz="1300" b="0">
+                <a:solidFill>
+                  <a:srgbClr val="FFFFFF"/>
+                </a:solidFill>
+                <a:latin typeface="Microsoft YaHei"/>
+              </a:rPr>
+              <a:t>塑造“金融+经营赋能”科技服务品牌</a:t>
             </a:r>
           </a:p>
         </p:txBody>
@@ -5813,7 +5997,7 @@
                 </a:solidFill>
                 <a:latin typeface="Microsoft YaHei"/>
               </a:rPr>
-              <a:t>三、风险事项与初步共识</a:t>
+              <a:t>三、风险事项与共识分层</a:t>
             </a:r>
           </a:p>
         </p:txBody>
@@ -5848,7 +6032,7 @@
                 </a:solidFill>
                 <a:latin typeface="Microsoft YaHei"/>
               </a:rPr>
-              <a:t>合规、采购、技术、结算仍待确认；优先推进两类场景</a:t>
+              <a:t>外部客户优先；行内提效与联名卡须专项论证</a:t>
             </a:r>
           </a:p>
         </p:txBody>
@@ -5896,8 +6080,8 @@
         </p:nvSpPr>
         <p:spPr>
           <a:xfrm>
-            <a:off x="411480" y="1463040"/>
-            <a:ext cx="5760720" cy="777240"/>
+            <a:off x="411480" y="1417320"/>
+            <a:ext cx="5760720" cy="804672"/>
           </a:xfrm>
           <a:prstGeom prst="roundRect">
             <a:avLst>
@@ -5942,8 +6126,8 @@
         </p:nvSpPr>
         <p:spPr>
           <a:xfrm>
-            <a:off x="594360" y="1554480"/>
-            <a:ext cx="5394960" cy="274320"/>
+            <a:off x="594360" y="1508760"/>
+            <a:ext cx="5394960" cy="256032"/>
           </a:xfrm>
           <a:prstGeom prst="rect">
             <a:avLst/>
@@ -5977,8 +6161,8 @@
         </p:nvSpPr>
         <p:spPr>
           <a:xfrm>
-            <a:off x="594360" y="1828800"/>
-            <a:ext cx="5394960" cy="365760"/>
+            <a:off x="594360" y="1783080"/>
+            <a:ext cx="5394960" cy="384048"/>
           </a:xfrm>
           <a:prstGeom prst="rect">
             <a:avLst/>
@@ -5999,7 +6183,7 @@
                 </a:solidFill>
                 <a:latin typeface="Microsoft YaHei"/>
               </a:rPr>
-              <a:t>公有云SaaS不接行内网，但仍需审查数据隔离、访问权限、日志与责任机制；首期仅用于外部客户权益</a:t>
+              <a:t>行外SaaS需审查数据隔离与权限；行内系统/小程序合规要求更高，须专项评估</a:t>
             </a:r>
           </a:p>
         </p:txBody>
@@ -6012,8 +6196,8 @@
         </p:nvSpPr>
         <p:spPr>
           <a:xfrm>
-            <a:off x="411480" y="2331720"/>
-            <a:ext cx="5760720" cy="777240"/>
+            <a:off x="411480" y="2286000"/>
+            <a:ext cx="5760720" cy="804672"/>
           </a:xfrm>
           <a:prstGeom prst="roundRect">
             <a:avLst>
@@ -6058,8 +6242,8 @@
         </p:nvSpPr>
         <p:spPr>
           <a:xfrm>
-            <a:off x="594360" y="2423160"/>
-            <a:ext cx="5394960" cy="274320"/>
+            <a:off x="594360" y="2377440"/>
+            <a:ext cx="5394960" cy="256032"/>
           </a:xfrm>
           <a:prstGeom prst="rect">
             <a:avLst/>
@@ -6093,8 +6277,8 @@
         </p:nvSpPr>
         <p:spPr>
           <a:xfrm>
-            <a:off x="594360" y="2697480"/>
-            <a:ext cx="5394960" cy="365760"/>
+            <a:off x="594360" y="2651760"/>
+            <a:ext cx="5394960" cy="384048"/>
           </a:xfrm>
           <a:prstGeom prst="rect">
             <a:avLst/>
@@ -6115,7 +6299,7 @@
                 </a:solidFill>
                 <a:latin typeface="Microsoft YaHei"/>
               </a:rPr>
-              <a:t>缺兑换/激活/使用/转化数据，忌一次性大额采购；建议分期交付与效果验收</a:t>
+              <a:t>缺兑换/激活/使用数据，忌一次性大额采购；行外与行员份额分账核算</a:t>
             </a:r>
           </a:p>
         </p:txBody>
@@ -6128,8 +6312,8 @@
         </p:nvSpPr>
         <p:spPr>
           <a:xfrm>
-            <a:off x="411480" y="3200400"/>
-            <a:ext cx="5760720" cy="777240"/>
+            <a:off x="411480" y="3154680"/>
+            <a:ext cx="5760720" cy="804672"/>
           </a:xfrm>
           <a:prstGeom prst="roundRect">
             <a:avLst>
@@ -6174,8 +6358,8 @@
         </p:nvSpPr>
         <p:spPr>
           <a:xfrm>
-            <a:off x="594360" y="3291840"/>
-            <a:ext cx="5394960" cy="274320"/>
+            <a:off x="594360" y="3246120"/>
+            <a:ext cx="5394960" cy="256032"/>
           </a:xfrm>
           <a:prstGeom prst="rect">
             <a:avLst/>
@@ -6209,8 +6393,8 @@
         </p:nvSpPr>
         <p:spPr>
           <a:xfrm>
-            <a:off x="594360" y="3566160"/>
-            <a:ext cx="5394960" cy="365760"/>
+            <a:off x="594360" y="3520440"/>
+            <a:ext cx="5394960" cy="384048"/>
           </a:xfrm>
           <a:prstGeom prst="rect">
             <a:avLst/>
@@ -6231,7 +6415,7 @@
                 </a:solidFill>
                 <a:latin typeface="Microsoft YaHei"/>
               </a:rPr>
-              <a:t>批量兑换码、自助注册激活、分组与续费等需完整流程测试</a:t>
+              <a:t>兑换码自助激活、内部系统对接、员工发放流程均需完整测试</a:t>
             </a:r>
           </a:p>
         </p:txBody>
@@ -6244,8 +6428,8 @@
         </p:nvSpPr>
         <p:spPr>
           <a:xfrm>
-            <a:off x="411480" y="4069079"/>
-            <a:ext cx="5760720" cy="777240"/>
+            <a:off x="411480" y="4023359"/>
+            <a:ext cx="5760720" cy="804672"/>
           </a:xfrm>
           <a:prstGeom prst="roundRect">
             <a:avLst>
@@ -6290,8 +6474,8 @@
         </p:nvSpPr>
         <p:spPr>
           <a:xfrm>
-            <a:off x="594360" y="4160519"/>
-            <a:ext cx="5394960" cy="274320"/>
+            <a:off x="594360" y="4114799"/>
+            <a:ext cx="5394960" cy="256032"/>
           </a:xfrm>
           <a:prstGeom prst="rect">
             <a:avLst/>
@@ -6312,7 +6496,7 @@
                 </a:solidFill>
                 <a:latin typeface="Microsoft YaHei"/>
               </a:rPr>
-              <a:t>结算税务</a:t>
+              <a:t>联名信用卡</a:t>
             </a:r>
           </a:p>
         </p:txBody>
@@ -6325,8 +6509,8 @@
         </p:nvSpPr>
         <p:spPr>
           <a:xfrm>
-            <a:off x="594360" y="4434839"/>
-            <a:ext cx="5394960" cy="365760"/>
+            <a:off x="594360" y="4389119"/>
+            <a:ext cx="5394960" cy="384048"/>
           </a:xfrm>
           <a:prstGeom prst="rect">
             <a:avLst/>
@@ -6347,7 +6531,7 @@
                 </a:solidFill>
                 <a:latin typeface="Microsoft YaHei"/>
               </a:rPr>
-              <a:t>商城主体、发票与资金链路需财务/法务确认</a:t>
+              <a:t>卡种准入、权益兑付、分润与品牌授权尚待信用卡中心论证</a:t>
             </a:r>
           </a:p>
         </p:txBody>
@@ -6360,8 +6544,8 @@
         </p:nvSpPr>
         <p:spPr>
           <a:xfrm>
-            <a:off x="411480" y="4937760"/>
-            <a:ext cx="5760720" cy="777240"/>
+            <a:off x="411480" y="4892040"/>
+            <a:ext cx="5760720" cy="804672"/>
           </a:xfrm>
           <a:prstGeom prst="roundRect">
             <a:avLst>
@@ -6406,8 +6590,8 @@
         </p:nvSpPr>
         <p:spPr>
           <a:xfrm>
-            <a:off x="594360" y="5029200"/>
-            <a:ext cx="5394960" cy="274320"/>
+            <a:off x="594360" y="4983480"/>
+            <a:ext cx="5394960" cy="256032"/>
           </a:xfrm>
           <a:prstGeom prst="rect">
             <a:avLst/>
@@ -6441,8 +6625,8 @@
         </p:nvSpPr>
         <p:spPr>
           <a:xfrm>
-            <a:off x="594360" y="5303520"/>
-            <a:ext cx="5394960" cy="365760"/>
+            <a:off x="594360" y="5257800"/>
+            <a:ext cx="5394960" cy="384048"/>
           </a:xfrm>
           <a:prstGeom prst="rect">
             <a:avLst/>
@@ -6463,7 +6647,7 @@
                 </a:solidFill>
                 <a:latin typeface="Microsoft YaHei"/>
               </a:rPr>
-              <a:t>联合品牌与效果表述须授权并经宣传审核</a:t>
+              <a:t>联合品牌/联名卡表述须授权并经宣传与卡中心审核</a:t>
             </a:r>
           </a:p>
         </p:txBody>
@@ -6498,7 +6682,7 @@
                 </a:solidFill>
                 <a:latin typeface="Microsoft YaHei"/>
               </a:rPr>
-              <a:t>已达成共识（两轮谈判）</a:t>
+              <a:t>共识 / 补充方案分层</a:t>
             </a:r>
           </a:p>
         </p:txBody>
@@ -6511,8 +6695,8 @@
         </p:nvSpPr>
         <p:spPr>
           <a:xfrm>
-            <a:off x="6400800" y="1463040"/>
-            <a:ext cx="5349240" cy="4709160"/>
+            <a:off x="6400800" y="1417320"/>
+            <a:ext cx="5349240" cy="4754880"/>
           </a:xfrm>
           <a:prstGeom prst="roundRect">
             <a:avLst>
@@ -6557,8 +6741,43 @@
         </p:nvSpPr>
         <p:spPr>
           <a:xfrm>
-            <a:off x="6675120" y="1737360"/>
-            <a:ext cx="4937760" cy="4206240"/>
+            <a:off x="6629400" y="1554480"/>
+            <a:ext cx="4937760" cy="274320"/>
+          </a:xfrm>
+          <a:prstGeom prst="rect">
+            <a:avLst/>
+          </a:prstGeom>
+          <a:noFill/>
+        </p:spPr>
+        <p:txBody>
+          <a:bodyPr wrap="square" lIns="0" rIns="0" tIns="0" bIns="0" anchor="t">
+            <a:spAutoFit/>
+          </a:bodyPr>
+          <a:lstStyle/>
+          <a:p>
+            <a:pPr algn="l"/>
+            <a:r>
+              <a:rPr sz="1300" b="1">
+                <a:solidFill>
+                  <a:srgbClr val="C4A35A"/>
+                </a:solidFill>
+                <a:latin typeface="Microsoft YaHei"/>
+              </a:rPr>
+              <a:t>已达成共识</a:t>
+            </a:r>
+          </a:p>
+        </p:txBody>
+      </p:sp>
+      <p:sp>
+        <p:nvSpPr>
+          <p:cNvPr id="26" name="TextBox 25"/>
+          <p:cNvSpPr txBox="1"/>
+          <p:nvPr/>
+        </p:nvSpPr>
+        <p:spPr>
+          <a:xfrm>
+            <a:off x="6629400" y="1874519"/>
+            <a:ext cx="4937760" cy="1828800"/>
           </a:xfrm>
           <a:prstGeom prst="rect">
             <a:avLst/>
@@ -6573,11 +6792,11 @@
           <a:p>
             <a:pPr algn="l">
               <a:lnSpc>
-                <a:spcPct val="145000"/>
+                <a:spcPct val="130000"/>
               </a:lnSpc>
             </a:pPr>
             <a:r>
-              <a:rPr sz="1400" b="0">
+              <a:rPr sz="1200" b="0">
                 <a:solidFill>
                   <a:srgbClr val="C4A35A"/>
                 </a:solidFill>
@@ -6586,23 +6805,23 @@
               <a:t>●  </a:t>
             </a:r>
             <a:r>
-              <a:rPr sz="1400" b="0">
+              <a:rPr sz="1200" b="0">
                 <a:solidFill>
                   <a:srgbClr val="1F2A37"/>
                 </a:solidFill>
                 <a:latin typeface="Microsoft YaHei"/>
               </a:rPr>
-              <a:t>优先推进：积分商城兑换 + 开户赠礼</a:t>
+              <a:t>优先：积分商城兑换 + 开户赠礼</a:t>
             </a:r>
           </a:p>
           <a:p>
             <a:pPr algn="l">
               <a:lnSpc>
-                <a:spcPct val="145000"/>
+                <a:spcPct val="130000"/>
               </a:lnSpc>
             </a:pPr>
             <a:r>
-              <a:rPr sz="1400" b="0">
+              <a:rPr sz="1200" b="0">
                 <a:solidFill>
                   <a:srgbClr val="C4A35A"/>
                 </a:solidFill>
@@ -6611,23 +6830,23 @@
               <a:t>●  </a:t>
             </a:r>
             <a:r>
-              <a:rPr sz="1400" b="0">
+              <a:rPr sz="1200" b="0">
                 <a:solidFill>
                   <a:srgbClr val="1F2A37"/>
                 </a:solidFill>
                 <a:latin typeface="Microsoft YaHei"/>
               </a:rPr>
-              <a:t>采用兑换码/License，客户自助激活</a:t>
+              <a:t>兑换码/License 客户自助激活</a:t>
             </a:r>
           </a:p>
           <a:p>
             <a:pPr algn="l">
               <a:lnSpc>
-                <a:spcPct val="145000"/>
+                <a:spcPct val="130000"/>
               </a:lnSpc>
             </a:pPr>
             <a:r>
-              <a:rPr sz="1400" b="0">
+              <a:rPr sz="1200" b="0">
                 <a:solidFill>
                   <a:srgbClr val="C4A35A"/>
                 </a:solidFill>
@@ -6636,23 +6855,23 @@
               <a:t>●  </a:t>
             </a:r>
             <a:r>
-              <a:rPr sz="1400" b="0">
+              <a:rPr sz="1200" b="0">
                 <a:solidFill>
                   <a:srgbClr val="1F2A37"/>
                 </a:solidFill>
                 <a:latin typeface="Microsoft YaHei"/>
               </a:rPr>
-              <a:t>暂不印实体卡，后续再定电子/纸质形式</a:t>
+              <a:t>套餐与阶梯价；腾讯交完整方案</a:t>
             </a:r>
           </a:p>
           <a:p>
             <a:pPr algn="l">
               <a:lnSpc>
-                <a:spcPct val="145000"/>
+                <a:spcPct val="130000"/>
               </a:lnSpc>
             </a:pPr>
             <a:r>
-              <a:rPr sz="1400" b="0">
+              <a:rPr sz="1200" b="0">
                 <a:solidFill>
                   <a:srgbClr val="C4A35A"/>
                 </a:solidFill>
@@ -6661,102 +6880,27 @@
               <a:t>●  </a:t>
             </a:r>
             <a:r>
-              <a:rPr sz="1400" b="0">
+              <a:rPr sz="1200" b="0">
                 <a:solidFill>
                   <a:srgbClr val="1F2A37"/>
                 </a:solidFill>
                 <a:latin typeface="Microsoft YaHei"/>
               </a:rPr>
-              <a:t>按季度或半年度套餐及阶梯价设计</a:t>
-            </a:r>
-          </a:p>
-          <a:p>
-            <a:pPr algn="l">
-              <a:lnSpc>
-                <a:spcPct val="145000"/>
-              </a:lnSpc>
-            </a:pPr>
-            <a:r>
-              <a:rPr sz="1400" b="0">
-                <a:solidFill>
-                  <a:srgbClr val="C4A35A"/>
-                </a:solidFill>
-                <a:latin typeface="Microsoft YaHei"/>
-              </a:rPr>
-              <a:t>●  </a:t>
-            </a:r>
-            <a:r>
-              <a:rPr sz="1400" b="0">
-                <a:solidFill>
-                  <a:srgbClr val="1F2A37"/>
-                </a:solidFill>
-                <a:latin typeface="Microsoft YaHei"/>
-              </a:rPr>
-              <a:t>腾讯提交完整产品及商务方案</a:t>
-            </a:r>
-          </a:p>
-          <a:p>
-            <a:pPr algn="l">
-              <a:lnSpc>
-                <a:spcPct val="145000"/>
-              </a:lnSpc>
-            </a:pPr>
-            <a:r>
-              <a:rPr sz="1400" b="0">
-                <a:solidFill>
-                  <a:srgbClr val="C4A35A"/>
-                </a:solidFill>
-                <a:latin typeface="Microsoft YaHei"/>
-              </a:rPr>
-              <a:t>●  </a:t>
-            </a:r>
-            <a:r>
-              <a:rPr sz="1400" b="0">
-                <a:solidFill>
-                  <a:srgbClr val="1F2A37"/>
-                </a:solidFill>
-                <a:latin typeface="Microsoft YaHei"/>
-              </a:rPr>
-              <a:t>8月5日下午与分行领导进一步沟通</a:t>
-            </a:r>
-          </a:p>
-          <a:p>
-            <a:pPr algn="l">
-              <a:lnSpc>
-                <a:spcPct val="145000"/>
-              </a:lnSpc>
-            </a:pPr>
-            <a:r>
-              <a:rPr sz="1400" b="0">
-                <a:solidFill>
-                  <a:srgbClr val="C4A35A"/>
-                </a:solidFill>
-                <a:latin typeface="Microsoft YaHei"/>
-              </a:rPr>
-              <a:t>●  </a:t>
-            </a:r>
-            <a:r>
-              <a:rPr sz="1400" b="0">
-                <a:solidFill>
-                  <a:srgbClr val="1F2A37"/>
-                </a:solidFill>
-                <a:latin typeface="Microsoft YaHei"/>
-              </a:rPr>
-              <a:t>上海先行试点，效果好再扩围</a:t>
-            </a:r>
-          </a:p>
-        </p:txBody>
-      </p:sp>
-      <p:sp>
-        <p:nvSpPr>
-          <p:cNvPr id="26" name="TextBox 25"/>
+              <a:t>8/5与分行领导沟通；上海试点</a:t>
+            </a:r>
+          </a:p>
+        </p:txBody>
+      </p:sp>
+      <p:sp>
+        <p:nvSpPr>
+          <p:cNvPr id="27" name="TextBox 26"/>
           <p:cNvSpPr txBox="1"/>
           <p:nvPr/>
         </p:nvSpPr>
         <p:spPr>
           <a:xfrm>
-            <a:off x="457200" y="6510528"/>
-            <a:ext cx="9601200" cy="256032"/>
+            <a:off x="6629400" y="3794760"/>
+            <a:ext cx="4937760" cy="274320"/>
           </a:xfrm>
           <a:prstGeom prst="rect">
             <a:avLst/>
@@ -6771,6 +6915,164 @@
           <a:p>
             <a:pPr algn="l"/>
             <a:r>
+              <a:rPr sz="1300" b="1">
+                <a:solidFill>
+                  <a:srgbClr val="0B2F5B"/>
+                </a:solidFill>
+                <a:latin typeface="Microsoft YaHei"/>
+              </a:rPr>
+              <a:t>初步方案（本次补充）</a:t>
+            </a:r>
+          </a:p>
+        </p:txBody>
+      </p:sp>
+      <p:sp>
+        <p:nvSpPr>
+          <p:cNvPr id="28" name="TextBox 27"/>
+          <p:cNvSpPr txBox="1"/>
+          <p:nvPr/>
+        </p:nvSpPr>
+        <p:spPr>
+          <a:xfrm>
+            <a:off x="6629400" y="4114800"/>
+            <a:ext cx="4937760" cy="1828800"/>
+          </a:xfrm>
+          <a:prstGeom prst="rect">
+            <a:avLst/>
+          </a:prstGeom>
+          <a:noFill/>
+        </p:spPr>
+        <p:txBody>
+          <a:bodyPr wrap="square" lIns="0" rIns="0" tIns="0" bIns="0">
+            <a:spAutoFit/>
+          </a:bodyPr>
+          <a:lstStyle/>
+          <a:p>
+            <a:pPr algn="l">
+              <a:lnSpc>
+                <a:spcPct val="130000"/>
+              </a:lnSpc>
+            </a:pPr>
+            <a:r>
+              <a:rPr sz="1200" b="0">
+                <a:solidFill>
+                  <a:srgbClr val="C4A35A"/>
+                </a:solidFill>
+                <a:latin typeface="Microsoft YaHei"/>
+              </a:rPr>
+              <a:t>●  </a:t>
+            </a:r>
+            <a:r>
+              <a:rPr sz="1200" b="0">
+                <a:solidFill>
+                  <a:srgbClr val="1F2A37"/>
+                </a:solidFill>
+                <a:latin typeface="Microsoft YaHei"/>
+              </a:rPr>
+              <a:t>单列员工份额：行员采购+行外采购</a:t>
+            </a:r>
+          </a:p>
+          <a:p>
+            <a:pPr algn="l">
+              <a:lnSpc>
+                <a:spcPct val="130000"/>
+              </a:lnSpc>
+            </a:pPr>
+            <a:r>
+              <a:rPr sz="1200" b="0">
+                <a:solidFill>
+                  <a:srgbClr val="C4A35A"/>
+                </a:solidFill>
+                <a:latin typeface="Microsoft YaHei"/>
+              </a:rPr>
+              <a:t>●  </a:t>
+            </a:r>
+            <a:r>
+              <a:rPr sz="1200" b="0">
+                <a:solidFill>
+                  <a:srgbClr val="1F2A37"/>
+                </a:solidFill>
+                <a:latin typeface="Microsoft YaHei"/>
+              </a:rPr>
+              <a:t>行内：办公提效系统/小程序</a:t>
+            </a:r>
+          </a:p>
+          <a:p>
+            <a:pPr algn="l">
+              <a:lnSpc>
+                <a:spcPct val="130000"/>
+              </a:lnSpc>
+            </a:pPr>
+            <a:r>
+              <a:rPr sz="1200" b="0">
+                <a:solidFill>
+                  <a:srgbClr val="C4A35A"/>
+                </a:solidFill>
+                <a:latin typeface="Microsoft YaHei"/>
+              </a:rPr>
+              <a:t>●  </a:t>
+            </a:r>
+            <a:r>
+              <a:rPr sz="1200" b="0">
+                <a:solidFill>
+                  <a:srgbClr val="1F2A37"/>
+                </a:solidFill>
+                <a:latin typeface="Microsoft YaHei"/>
+              </a:rPr>
+              <a:t>行内：员工AI福利发放</a:t>
+            </a:r>
+          </a:p>
+          <a:p>
+            <a:pPr algn="l">
+              <a:lnSpc>
+                <a:spcPct val="130000"/>
+              </a:lnSpc>
+            </a:pPr>
+            <a:r>
+              <a:rPr sz="1200" b="0">
+                <a:solidFill>
+                  <a:srgbClr val="C4A35A"/>
+                </a:solidFill>
+                <a:latin typeface="Microsoft YaHei"/>
+              </a:rPr>
+              <a:t>●  </a:t>
+            </a:r>
+            <a:r>
+              <a:rPr sz="1200" b="0">
+                <a:solidFill>
+                  <a:srgbClr val="1F2A37"/>
+                </a:solidFill>
+                <a:latin typeface="Microsoft YaHei"/>
+              </a:rPr>
+              <a:t>对外：研究联名信用卡方案</a:t>
+            </a:r>
+          </a:p>
+        </p:txBody>
+      </p:sp>
+      <p:sp>
+        <p:nvSpPr>
+          <p:cNvPr id="29" name="TextBox 28"/>
+          <p:cNvSpPr txBox="1"/>
+          <p:nvPr/>
+        </p:nvSpPr>
+        <p:spPr>
+          <a:xfrm>
+            <a:off x="457200" y="6510528"/>
+            <a:ext cx="9601200" cy="256032"/>
+          </a:xfrm>
+          <a:prstGeom prst="rect">
+            <a:avLst/>
+          </a:prstGeom>
+          <a:noFill/>
+        </p:spPr>
+        <p:txBody>
+          <a:bodyPr wrap="square" lIns="0" rIns="0" tIns="0" bIns="0" anchor="t">
+            <a:spAutoFit/>
+          </a:bodyPr>
+          <a:lstStyle/>
+          <a:p>
+            <a:pPr algn="l"/>
+            <a:r>
               <a:rPr sz="1000" b="0">
                 <a:solidFill>
                   <a:srgbClr val="5C6B7A"/>
@@ -6784,7 +7086,7 @@
       </p:sp>
       <p:sp>
         <p:nvSpPr>
-          <p:cNvPr id="27" name="TextBox 26"/>
+          <p:cNvPr id="30" name="TextBox 29"/>
           <p:cNvSpPr txBox="1"/>
           <p:nvPr/>
         </p:nvSpPr>
@@ -7032,7 +7334,7 @@
                 </a:solidFill>
                 <a:latin typeface="Microsoft YaHei"/>
               </a:rPr>
-              <a:t>原则同意立项论证 · 授权继续谈判 · 先试点后扩量</a:t>
+              <a:t>原则同意推进 · 补充员工份额 · 研究联名卡 · 先试点后扩量</a:t>
             </a:r>
           </a:p>
         </p:txBody>
@@ -7045,8 +7347,8 @@
         </p:nvSpPr>
         <p:spPr>
           <a:xfrm>
-            <a:off x="411480" y="1143000"/>
-            <a:ext cx="5623560" cy="1280160"/>
+            <a:off x="365760" y="1097280"/>
+            <a:ext cx="5669280" cy="1097280"/>
           </a:xfrm>
           <a:prstGeom prst="roundRect">
             <a:avLst>
@@ -7091,8 +7393,8 @@
         </p:nvSpPr>
         <p:spPr>
           <a:xfrm>
-            <a:off x="594360" y="1417320"/>
-            <a:ext cx="731520" cy="731520"/>
+            <a:off x="502920" y="1280160"/>
+            <a:ext cx="640080" cy="685800"/>
           </a:xfrm>
           <a:prstGeom prst="roundRect">
             <a:avLst>
@@ -7137,8 +7439,8 @@
         </p:nvSpPr>
         <p:spPr>
           <a:xfrm>
-            <a:off x="594360" y="1417320"/>
-            <a:ext cx="731520" cy="731520"/>
+            <a:off x="502920" y="1280160"/>
+            <a:ext cx="640080" cy="685800"/>
           </a:xfrm>
           <a:prstGeom prst="rect">
             <a:avLst/>
@@ -7153,7 +7455,7 @@
           <a:p>
             <a:pPr algn="ctr"/>
             <a:r>
-              <a:rPr sz="1800" b="1">
+              <a:rPr sz="1600" b="1">
                 <a:solidFill>
                   <a:srgbClr val="C4A35A"/>
                 </a:solidFill>
@@ -7172,8 +7474,8 @@
         </p:nvSpPr>
         <p:spPr>
           <a:xfrm>
-            <a:off x="1508760" y="1417320"/>
-            <a:ext cx="4297680" cy="411480"/>
+            <a:off x="1325880" y="1298448"/>
+            <a:ext cx="4480560" cy="365760"/>
           </a:xfrm>
           <a:prstGeom prst="rect">
             <a:avLst/>
@@ -7188,7 +7490,7 @@
           <a:p>
             <a:pPr algn="l"/>
             <a:r>
-              <a:rPr sz="1600" b="1">
+              <a:rPr sz="1500" b="1">
                 <a:solidFill>
                   <a:srgbClr val="0B2F5B"/>
                 </a:solidFill>
@@ -7207,8 +7509,8 @@
         </p:nvSpPr>
         <p:spPr>
           <a:xfrm>
-            <a:off x="1508760" y="1828800"/>
-            <a:ext cx="4297680" cy="411480"/>
+            <a:off x="1325880" y="1691640"/>
+            <a:ext cx="4480560" cy="365760"/>
           </a:xfrm>
           <a:prstGeom prst="rect">
             <a:avLst/>
@@ -7229,7 +7531,7 @@
                 </a:solidFill>
                 <a:latin typeface="Microsoft YaHei"/>
               </a:rPr>
-              <a:t>作为中小微增值服务创新方向继续论证</a:t>
+              <a:t>客户增值服务 + 行内数字化提效继续论证</a:t>
             </a:r>
           </a:p>
         </p:txBody>
@@ -7242,8 +7544,8 @@
         </p:nvSpPr>
         <p:spPr>
           <a:xfrm>
-            <a:off x="6263640" y="1143000"/>
-            <a:ext cx="5623560" cy="1280160"/>
+            <a:off x="6263640" y="1097280"/>
+            <a:ext cx="5669280" cy="1097280"/>
           </a:xfrm>
           <a:prstGeom prst="roundRect">
             <a:avLst>
@@ -7288,8 +7590,8 @@
         </p:nvSpPr>
         <p:spPr>
           <a:xfrm>
-            <a:off x="6446520" y="1417320"/>
-            <a:ext cx="731520" cy="731520"/>
+            <a:off x="6400800" y="1280160"/>
+            <a:ext cx="640080" cy="685800"/>
           </a:xfrm>
           <a:prstGeom prst="roundRect">
             <a:avLst>
@@ -7334,8 +7636,8 @@
         </p:nvSpPr>
         <p:spPr>
           <a:xfrm>
-            <a:off x="6446520" y="1417320"/>
-            <a:ext cx="731520" cy="731520"/>
+            <a:off x="6400800" y="1280160"/>
+            <a:ext cx="640080" cy="685800"/>
           </a:xfrm>
           <a:prstGeom prst="rect">
             <a:avLst/>
@@ -7350,7 +7652,7 @@
           <a:p>
             <a:pPr algn="ctr"/>
             <a:r>
-              <a:rPr sz="1800" b="1">
+              <a:rPr sz="1600" b="1">
                 <a:solidFill>
                   <a:srgbClr val="C4A35A"/>
                 </a:solidFill>
@@ -7369,8 +7671,8 @@
         </p:nvSpPr>
         <p:spPr>
           <a:xfrm>
-            <a:off x="7360920" y="1417320"/>
-            <a:ext cx="4297680" cy="411480"/>
+            <a:off x="7223760" y="1298448"/>
+            <a:ext cx="4480560" cy="365760"/>
           </a:xfrm>
           <a:prstGeom prst="rect">
             <a:avLst/>
@@ -7385,7 +7687,7 @@
           <a:p>
             <a:pPr algn="l"/>
             <a:r>
-              <a:rPr sz="1600" b="1">
+              <a:rPr sz="1500" b="1">
                 <a:solidFill>
                   <a:srgbClr val="0B2F5B"/>
                 </a:solidFill>
@@ -7404,8 +7706,8 @@
         </p:nvSpPr>
         <p:spPr>
           <a:xfrm>
-            <a:off x="7360920" y="1828800"/>
-            <a:ext cx="4297680" cy="411480"/>
+            <a:off x="7223760" y="1691640"/>
+            <a:ext cx="4480560" cy="365760"/>
           </a:xfrm>
           <a:prstGeom prst="rect">
             <a:avLst/>
@@ -7439,8 +7741,8 @@
         </p:nvSpPr>
         <p:spPr>
           <a:xfrm>
-            <a:off x="411480" y="2560320"/>
-            <a:ext cx="5623560" cy="1280160"/>
+            <a:off x="365760" y="2331720"/>
+            <a:ext cx="5669280" cy="1097280"/>
           </a:xfrm>
           <a:prstGeom prst="roundRect">
             <a:avLst>
@@ -7485,8 +7787,8 @@
         </p:nvSpPr>
         <p:spPr>
           <a:xfrm>
-            <a:off x="594360" y="2834640"/>
-            <a:ext cx="731520" cy="731520"/>
+            <a:off x="502920" y="2514600"/>
+            <a:ext cx="640080" cy="685800"/>
           </a:xfrm>
           <a:prstGeom prst="roundRect">
             <a:avLst>
@@ -7531,8 +7833,8 @@
         </p:nvSpPr>
         <p:spPr>
           <a:xfrm>
-            <a:off x="594360" y="2834640"/>
-            <a:ext cx="731520" cy="731520"/>
+            <a:off x="502920" y="2514600"/>
+            <a:ext cx="640080" cy="685800"/>
           </a:xfrm>
           <a:prstGeom prst="rect">
             <a:avLst/>
@@ -7547,7 +7849,7 @@
           <a:p>
             <a:pPr algn="ctr"/>
             <a:r>
-              <a:rPr sz="1800" b="1">
+              <a:rPr sz="1600" b="1">
                 <a:solidFill>
                   <a:srgbClr val="C4A35A"/>
                 </a:solidFill>
@@ -7566,8 +7868,8 @@
         </p:nvSpPr>
         <p:spPr>
           <a:xfrm>
-            <a:off x="1508760" y="2834640"/>
-            <a:ext cx="4297680" cy="411480"/>
+            <a:off x="1325880" y="2532888"/>
+            <a:ext cx="4480560" cy="365760"/>
           </a:xfrm>
           <a:prstGeom prst="rect">
             <a:avLst/>
@@ -7582,13 +7884,13 @@
           <a:p>
             <a:pPr algn="l"/>
             <a:r>
-              <a:rPr sz="1600" b="1">
+              <a:rPr sz="1500" b="1">
                 <a:solidFill>
                   <a:srgbClr val="0B2F5B"/>
                 </a:solidFill>
                 <a:latin typeface="Microsoft YaHei"/>
               </a:rPr>
-              <a:t>启动跨部门评估</a:t>
+              <a:t>补充员工采购份额</a:t>
             </a:r>
           </a:p>
         </p:txBody>
@@ -7601,8 +7903,8 @@
         </p:nvSpPr>
         <p:spPr>
           <a:xfrm>
-            <a:off x="1508760" y="3246120"/>
-            <a:ext cx="4297680" cy="411480"/>
+            <a:off x="1325880" y="2926080"/>
+            <a:ext cx="4480560" cy="365760"/>
           </a:xfrm>
           <a:prstGeom prst="rect">
             <a:avLst/>
@@ -7623,7 +7925,7 @@
                 </a:solidFill>
                 <a:latin typeface="Microsoft YaHei"/>
               </a:rPr>
-              <a:t>公司金融、权益、科技、合规、法务、财务、采购</a:t>
+              <a:t>行员采购+行外采购；福利可先行，系统须评估</a:t>
             </a:r>
           </a:p>
         </p:txBody>
@@ -7636,8 +7938,8 @@
         </p:nvSpPr>
         <p:spPr>
           <a:xfrm>
-            <a:off x="6263640" y="2560320"/>
-            <a:ext cx="5623560" cy="1280160"/>
+            <a:off x="6263640" y="2331720"/>
+            <a:ext cx="5669280" cy="1097280"/>
           </a:xfrm>
           <a:prstGeom prst="roundRect">
             <a:avLst>
@@ -7682,8 +7984,8 @@
         </p:nvSpPr>
         <p:spPr>
           <a:xfrm>
-            <a:off x="6446520" y="2834640"/>
-            <a:ext cx="731520" cy="731520"/>
+            <a:off x="6400800" y="2514600"/>
+            <a:ext cx="640080" cy="685800"/>
           </a:xfrm>
           <a:prstGeom prst="roundRect">
             <a:avLst>
@@ -7728,8 +8030,8 @@
         </p:nvSpPr>
         <p:spPr>
           <a:xfrm>
-            <a:off x="6446520" y="2834640"/>
-            <a:ext cx="731520" cy="731520"/>
+            <a:off x="6400800" y="2514600"/>
+            <a:ext cx="640080" cy="685800"/>
           </a:xfrm>
           <a:prstGeom prst="rect">
             <a:avLst/>
@@ -7744,7 +8046,7 @@
           <a:p>
             <a:pPr algn="ctr"/>
             <a:r>
-              <a:rPr sz="1800" b="1">
+              <a:rPr sz="1600" b="1">
                 <a:solidFill>
                   <a:srgbClr val="C4A35A"/>
                 </a:solidFill>
@@ -7763,8 +8065,8 @@
         </p:nvSpPr>
         <p:spPr>
           <a:xfrm>
-            <a:off x="7360920" y="2834640"/>
-            <a:ext cx="4297680" cy="411480"/>
+            <a:off x="7223760" y="2532888"/>
+            <a:ext cx="4480560" cy="365760"/>
           </a:xfrm>
           <a:prstGeom prst="rect">
             <a:avLst/>
@@ -7779,13 +8081,13 @@
           <a:p>
             <a:pPr algn="l"/>
             <a:r>
-              <a:rPr sz="1600" b="1">
+              <a:rPr sz="1500" b="1">
                 <a:solidFill>
                   <a:srgbClr val="0B2F5B"/>
                 </a:solidFill>
                 <a:latin typeface="Microsoft YaHei"/>
               </a:rPr>
-              <a:t>授权继续商务谈判</a:t>
+              <a:t>研究联名信用卡</a:t>
             </a:r>
           </a:p>
         </p:txBody>
@@ -7798,8 +8100,8 @@
         </p:nvSpPr>
         <p:spPr>
           <a:xfrm>
-            <a:off x="7360920" y="3246120"/>
-            <a:ext cx="4297680" cy="411480"/>
+            <a:off x="7223760" y="2926080"/>
+            <a:ext cx="4480560" cy="365760"/>
           </a:xfrm>
           <a:prstGeom prst="rect">
             <a:avLst/>
@@ -7820,7 +8122,7 @@
                 </a:solidFill>
                 <a:latin typeface="Microsoft YaHei"/>
               </a:rPr>
-              <a:t>1,500万为测算框架；首期金额另行审批</a:t>
+              <a:t>授权卡中心论证，不作为立即发卡承诺</a:t>
             </a:r>
           </a:p>
         </p:txBody>
@@ -7833,8 +8135,54 @@
         </p:nvSpPr>
         <p:spPr>
           <a:xfrm>
-            <a:off x="411480" y="4114800"/>
-            <a:ext cx="11338560" cy="2011680"/>
+            <a:off x="365760" y="3611880"/>
+            <a:ext cx="11430000" cy="868680"/>
+          </a:xfrm>
+          <a:prstGeom prst="roundRect">
+            <a:avLst>
+              <a:gd name="adj" fmla="val 8000"/>
+            </a:avLst>
+          </a:prstGeom>
+          <a:solidFill>
+            <a:srgbClr val="E8EEF5"/>
+          </a:solidFill>
+          <a:ln>
+            <a:noFill/>
+          </a:ln>
+          <a:effectLst/>
+        </p:spPr>
+        <p:style>
+          <a:lnRef idx="1">
+            <a:schemeClr val="accent1"/>
+          </a:lnRef>
+          <a:fillRef idx="3">
+            <a:schemeClr val="accent1"/>
+          </a:fillRef>
+          <a:effectRef idx="2">
+            <a:schemeClr val="accent1"/>
+          </a:effectRef>
+          <a:fontRef idx="minor">
+            <a:schemeClr val="lt1"/>
+          </a:fontRef>
+        </p:style>
+        <p:txBody>
+          <a:bodyPr rtlCol="0" anchor="ctr"/>
+          <a:lstStyle/>
+          <a:p>
+            <a:pPr algn="ctr"/>
+          </a:p>
+        </p:txBody>
+      </p:sp>
+      <p:sp>
+        <p:nvSpPr>
+          <p:cNvPr id="28" name="Rounded Rectangle 27"/>
+          <p:cNvSpPr/>
+          <p:nvPr/>
+        </p:nvSpPr>
+        <p:spPr>
+          <a:xfrm>
+            <a:off x="502920" y="3703320"/>
+            <a:ext cx="640080" cy="685800"/>
           </a:xfrm>
           <a:prstGeom prst="roundRect">
             <a:avLst>
@@ -7873,14 +8221,49 @@
       </p:sp>
       <p:sp>
         <p:nvSpPr>
-          <p:cNvPr id="28" name="TextBox 27"/>
+          <p:cNvPr id="29" name="TextBox 28"/>
           <p:cNvSpPr txBox="1"/>
           <p:nvPr/>
         </p:nvSpPr>
         <p:spPr>
           <a:xfrm>
-            <a:off x="685800" y="4297680"/>
-            <a:ext cx="10789920" cy="320040"/>
+            <a:off x="502920" y="3703320"/>
+            <a:ext cx="640080" cy="685800"/>
+          </a:xfrm>
+          <a:prstGeom prst="rect">
+            <a:avLst/>
+          </a:prstGeom>
+          <a:noFill/>
+        </p:spPr>
+        <p:txBody>
+          <a:bodyPr wrap="square" lIns="0" rIns="0" tIns="0" bIns="0" anchor="ctr">
+            <a:spAutoFit/>
+          </a:bodyPr>
+          <a:lstStyle/>
+          <a:p>
+            <a:pPr algn="ctr"/>
+            <a:r>
+              <a:rPr sz="1600" b="1">
+                <a:solidFill>
+                  <a:srgbClr val="C4A35A"/>
+                </a:solidFill>
+                <a:latin typeface="Microsoft YaHei"/>
+              </a:rPr>
+              <a:t>05</a:t>
+            </a:r>
+          </a:p>
+        </p:txBody>
+      </p:sp>
+      <p:sp>
+        <p:nvSpPr>
+          <p:cNvPr id="30" name="TextBox 29"/>
+          <p:cNvSpPr txBox="1"/>
+          <p:nvPr/>
+        </p:nvSpPr>
+        <p:spPr>
+          <a:xfrm>
+            <a:off x="1325880" y="3749039"/>
+            <a:ext cx="10241280" cy="320040"/>
           </a:xfrm>
           <a:prstGeom prst="rect">
             <a:avLst/>
@@ -7895,27 +8278,27 @@
           <a:p>
             <a:pPr algn="l"/>
             <a:r>
-              <a:rPr sz="1400" b="1">
-                <a:solidFill>
-                  <a:srgbClr val="C4A35A"/>
-                </a:solidFill>
-                <a:latin typeface="Microsoft YaHei"/>
-              </a:rPr>
-              <a:t>汇报结论 / 下一步</a:t>
-            </a:r>
-          </a:p>
-        </p:txBody>
-      </p:sp>
-      <p:sp>
-        <p:nvSpPr>
-          <p:cNvPr id="29" name="TextBox 28"/>
+              <a:rPr sz="1500" b="1">
+                <a:solidFill>
+                  <a:srgbClr val="0B2F5B"/>
+                </a:solidFill>
+                <a:latin typeface="Microsoft YaHei"/>
+              </a:rPr>
+              <a:t>跨部门评估+继续谈判</a:t>
+            </a:r>
+          </a:p>
+        </p:txBody>
+      </p:sp>
+      <p:sp>
+        <p:nvSpPr>
+          <p:cNvPr id="31" name="TextBox 30"/>
           <p:cNvSpPr txBox="1"/>
           <p:nvPr/>
         </p:nvSpPr>
         <p:spPr>
           <a:xfrm>
-            <a:off x="685800" y="4709160"/>
-            <a:ext cx="10789920" cy="1188720"/>
+            <a:off x="1325880" y="4114800"/>
+            <a:ext cx="10241280" cy="320040"/>
           </a:xfrm>
           <a:prstGeom prst="rect">
             <a:avLst/>
@@ -7930,51 +8313,73 @@
           <a:p>
             <a:pPr algn="l"/>
             <a:r>
-              <a:rPr sz="1300" b="0">
-                <a:solidFill>
-                  <a:srgbClr val="FFFFFF"/>
-                </a:solidFill>
-                <a:latin typeface="Microsoft YaHei"/>
-              </a:rPr>
-              <a:t>建议行长原则同意立项论证并授权继续谈判，先试点、后扩量，以实际客户转化和使用效果作为后续采购依据。</a:t>
-            </a:r>
-          </a:p>
-          <a:p>
-            <a:pPr algn="l"/>
-            <a:r>
-              <a:rPr sz="1300" b="0">
-                <a:solidFill>
-                  <a:srgbClr val="FFFFFF"/>
-                </a:solidFill>
-                <a:latin typeface="Microsoft YaHei"/>
-              </a:rPr>
-              <a:t>下一步：① 8/5前腾讯提交完整方案　② 明确300万/500万两档权益　③ 完成兑换激活全流程演示</a:t>
-            </a:r>
-          </a:p>
-          <a:p>
-            <a:pPr algn="l"/>
-            <a:r>
-              <a:rPr sz="1300" b="0">
-                <a:solidFill>
-                  <a:srgbClr val="FFFFFF"/>
-                </a:solidFill>
-                <a:latin typeface="Microsoft YaHei"/>
-              </a:rPr>
-              <a:t>　　　　④ 启动法务合规科技财务采购预审　⑤ 设计试点方案与量化指标　⑥ 达标后再启动二三阶段采购</a:t>
-            </a:r>
-          </a:p>
-        </p:txBody>
-      </p:sp>
-      <p:sp>
-        <p:nvSpPr>
-          <p:cNvPr id="30" name="TextBox 29"/>
+              <a:rPr sz="1200" b="0">
+                <a:solidFill>
+                  <a:srgbClr val="1F2A37"/>
+                </a:solidFill>
+                <a:latin typeface="Microsoft YaHei"/>
+              </a:rPr>
+              <a:t>1,500万为测算框架；首期金额另行审批</a:t>
+            </a:r>
+          </a:p>
+        </p:txBody>
+      </p:sp>
+      <p:sp>
+        <p:nvSpPr>
+          <p:cNvPr id="32" name="Rounded Rectangle 31"/>
+          <p:cNvSpPr/>
+          <p:nvPr/>
+        </p:nvSpPr>
+        <p:spPr>
+          <a:xfrm>
+            <a:off x="365760" y="4663440"/>
+            <a:ext cx="11430000" cy="1554480"/>
+          </a:xfrm>
+          <a:prstGeom prst="roundRect">
+            <a:avLst>
+              <a:gd name="adj" fmla="val 8000"/>
+            </a:avLst>
+          </a:prstGeom>
+          <a:solidFill>
+            <a:srgbClr val="0B2F5B"/>
+          </a:solidFill>
+          <a:ln>
+            <a:noFill/>
+          </a:ln>
+          <a:effectLst/>
+        </p:spPr>
+        <p:style>
+          <a:lnRef idx="1">
+            <a:schemeClr val="accent1"/>
+          </a:lnRef>
+          <a:fillRef idx="3">
+            <a:schemeClr val="accent1"/>
+          </a:fillRef>
+          <a:effectRef idx="2">
+            <a:schemeClr val="accent1"/>
+          </a:effectRef>
+          <a:fontRef idx="minor">
+            <a:schemeClr val="lt1"/>
+          </a:fontRef>
+        </p:style>
+        <p:txBody>
+          <a:bodyPr rtlCol="0" anchor="ctr"/>
+          <a:lstStyle/>
+          <a:p>
+            <a:pPr algn="ctr"/>
+          </a:p>
+        </p:txBody>
+      </p:sp>
+      <p:sp>
+        <p:nvSpPr>
+          <p:cNvPr id="33" name="TextBox 32"/>
           <p:cNvSpPr txBox="1"/>
           <p:nvPr/>
         </p:nvSpPr>
         <p:spPr>
           <a:xfrm>
-            <a:off x="457200" y="6510528"/>
-            <a:ext cx="9601200" cy="256032"/>
+            <a:off x="640080" y="4800600"/>
+            <a:ext cx="10881360" cy="274320"/>
           </a:xfrm>
           <a:prstGeom prst="rect">
             <a:avLst/>
@@ -7989,6 +8394,100 @@
           <a:p>
             <a:pPr algn="l"/>
             <a:r>
+              <a:rPr sz="1300" b="1">
+                <a:solidFill>
+                  <a:srgbClr val="C4A35A"/>
+                </a:solidFill>
+                <a:latin typeface="Microsoft YaHei"/>
+              </a:rPr>
+              <a:t>汇报结论 / 下一步</a:t>
+            </a:r>
+          </a:p>
+        </p:txBody>
+      </p:sp>
+      <p:sp>
+        <p:nvSpPr>
+          <p:cNvPr id="34" name="TextBox 33"/>
+          <p:cNvSpPr txBox="1"/>
+          <p:nvPr/>
+        </p:nvSpPr>
+        <p:spPr>
+          <a:xfrm>
+            <a:off x="640080" y="5120640"/>
+            <a:ext cx="10881360" cy="914400"/>
+          </a:xfrm>
+          <a:prstGeom prst="rect">
+            <a:avLst/>
+          </a:prstGeom>
+          <a:noFill/>
+        </p:spPr>
+        <p:txBody>
+          <a:bodyPr wrap="square" lIns="0" rIns="0" tIns="0" bIns="0" anchor="t">
+            <a:spAutoFit/>
+          </a:bodyPr>
+          <a:lstStyle/>
+          <a:p>
+            <a:pPr algn="l"/>
+            <a:r>
+              <a:rPr sz="1200" b="0">
+                <a:solidFill>
+                  <a:srgbClr val="FFFFFF"/>
+                </a:solidFill>
+                <a:latin typeface="Microsoft YaHei"/>
+              </a:rPr>
+              <a:t>建议原则同意立项论证并授权继续谈判，同步论证员工份额与联名信用卡；先试点、后扩量。</a:t>
+            </a:r>
+          </a:p>
+          <a:p>
+            <a:pPr algn="l"/>
+            <a:r>
+              <a:rPr sz="1200" b="0">
+                <a:solidFill>
+                  <a:srgbClr val="FFFFFF"/>
+                </a:solidFill>
+                <a:latin typeface="Microsoft YaHei"/>
+              </a:rPr>
+              <a:t>下一步：① 8/5前腾讯交完整方案（含行外/行员份额）　② 300万/500万两档　③ 兑换激活演示</a:t>
+            </a:r>
+          </a:p>
+          <a:p>
+            <a:pPr algn="l"/>
+            <a:r>
+              <a:rPr sz="1200" b="0">
+                <a:solidFill>
+                  <a:srgbClr val="FFFFFF"/>
+                </a:solidFill>
+                <a:latin typeface="Microsoft YaHei"/>
+              </a:rPr>
+              <a:t>　　　　④ 内部系统合规边界　⑤ 联名卡预研　⑥ 跨部门预审与试点指标　⑦ 达标后再扩量采购</a:t>
+            </a:r>
+          </a:p>
+        </p:txBody>
+      </p:sp>
+      <p:sp>
+        <p:nvSpPr>
+          <p:cNvPr id="35" name="TextBox 34"/>
+          <p:cNvSpPr txBox="1"/>
+          <p:nvPr/>
+        </p:nvSpPr>
+        <p:spPr>
+          <a:xfrm>
+            <a:off x="457200" y="6510528"/>
+            <a:ext cx="9601200" cy="256032"/>
+          </a:xfrm>
+          <a:prstGeom prst="rect">
+            <a:avLst/>
+          </a:prstGeom>
+          <a:noFill/>
+        </p:spPr>
+        <p:txBody>
+          <a:bodyPr wrap="square" lIns="0" rIns="0" tIns="0" bIns="0" anchor="t">
+            <a:spAutoFit/>
+          </a:bodyPr>
+          <a:lstStyle/>
+          <a:p>
+            <a:pPr algn="l"/>
+            <a:r>
               <a:rPr sz="1000" b="0">
                 <a:solidFill>
                   <a:srgbClr val="5C6B7A"/>
@@ -8002,7 +8501,7 @@
       </p:sp>
       <p:sp>
         <p:nvSpPr>
-          <p:cNvPr id="31" name="TextBox 30"/>
+          <p:cNvPr id="36" name="TextBox 35"/>
           <p:cNvSpPr txBox="1"/>
           <p:nvPr/>
         </p:nvSpPr>
